--- a/Б.7.5_Проектирование_строительство_газовых_сетей.pptx
+++ b/Б.7.5_Проектирование_строительство_газовых_сетей.pptx
@@ -9638,7 +9638,7 @@
                 </a:solidFill>
                 <a:latin typeface="Inter"/>
               </a:rPr>
-              <a:t>Классификация сетей газораспределения и газопotребления по давлению, назначению и способу прокладки.</a:t>
+              <a:t>Классификация сетей газораспределения и газопотребления по давлению, назначению и способу прокладки.</a:t>
             </a:r>
           </a:p>
         </p:txBody>

--- a/Б.7.5_Проектирование_строительство_газовых_сетей.pptx
+++ b/Б.7.5_Проектирование_строительство_газовых_сетей.pptx
@@ -3958,7 +3958,7 @@
                 </a:solidFill>
                 <a:latin typeface="Inter"/>
               </a:rPr>
-              <a:t>Подготовка трассы, траншеи, способы прокладки (подземная, наземная, в коллекторах).</a:t>
+              <a:t>СМР — по проекту и технологическим картам; при отступлениях работы приостанавливаются (ТР п. 56–57).</a:t>
             </a:r>
           </a:p>
         </p:txBody>
@@ -4028,7 +4028,7 @@
                 </a:solidFill>
                 <a:latin typeface="Inter"/>
               </a:rPr>
-              <a:t>Монтаж стальных и полиэтиленовых газопроводов; требования к стыковым соединениям.</a:t>
+              <a:t>Сварка при СМР: герметичность, запрет швов в стенах, НК аттестованным контролёром (ТР п. 58–60).</a:t>
             </a:r>
           </a:p>
         </p:txBody>
@@ -4098,7 +4098,7 @@
                 </a:solidFill>
                 <a:latin typeface="Inter"/>
               </a:rPr>
-              <a:t>Строительный контроль и авторский надзор; журналы работ и акты скрытых работ.</a:t>
+              <a:t>Газоопасные работы: врезка, пуск газа, снятие заглушек, сварка на действующих газопроводах (ФНП № 531, п. 129).</a:t>
             </a:r>
           </a:p>
         </p:txBody>
@@ -4168,7 +4168,7 @@
                 </a:solidFill>
                 <a:latin typeface="Inter"/>
               </a:rPr>
-              <a:t>Реконструкция изношенных газопроводов; методы бестраншейной замены и параллельной прокладки.</a:t>
+              <a:t>Охранные зоны: запрет обработки почвы &gt; 0,3 м без разрешения эксплуатационной организации (ПП РФ № 878, п. 14, 16).</a:t>
             </a:r>
           </a:p>
         </p:txBody>
@@ -4447,7 +4447,7 @@
                 </a:solidFill>
                 <a:latin typeface="Inter"/>
               </a:rPr>
-              <a:t>Капитальный ремонт и техническое перевооружение выполняются по проекту или технической документации с отключением и продувкой участков, оформлением нарядов-допусков на газоопасные работы. Консервация и расконсервация газопроводов — по регламенту с испытаниями перед пуском газа.</a:t>
+              <a:t>Перед ремонтом оборудование отключается от действующих газопроводов с установкой заглушки после запорной арматуры (ФНП № 531, п. 40). После ремонта — испытания по проекту (ФНП № 531, п. 41). Консервация — по проекту с уведомлением Ростехнадзора (ТР п. 81–85). Снятие заглушек — после испытаний на прочность и герметичность (ФНП № 531, п. 50).</a:t>
             </a:r>
           </a:p>
         </p:txBody>
@@ -4482,7 +4482,7 @@
                 </a:solidFill>
                 <a:latin typeface="Inter"/>
               </a:rPr>
-              <a:t>Запрещается ввод в эксплуатацию объектов без испытаний и оформления исполнительной документации.</a:t>
+              <a:t>Ввод в эксплуатацию без испытаний и исполнительной документации не допускается (ТР п. 61).</a:t>
             </a:r>
           </a:p>
         </p:txBody>
@@ -4726,7 +4726,7 @@
                 </a:solidFill>
                 <a:latin typeface="Inter"/>
               </a:rPr>
-              <a:t>Перечень газоопасных работ: врезка, пуск газа, снятие заглушек, сварка на действующих газопроводах.</a:t>
+              <a:t>Газоопасные работы — по наряду-допуску; перечень утверждается руководителем (ФНП № 531, п. 129, 132–133).</a:t>
             </a:r>
           </a:p>
         </p:txBody>
@@ -4796,7 +4796,7 @@
                 </a:solidFill>
                 <a:latin typeface="Inter"/>
               </a:rPr>
-              <a:t>Наряд-допуск и план газоопасных работ; роли ответственного руководителя и исполнителей.</a:t>
+              <a:t>Наряд-допуск: срок действия, инструктаж, анализ газовоздушной смеси в колодцах и ПРГ (ФНП № 531, п. 140, 146).</a:t>
             </a:r>
           </a:p>
         </p:txBody>
@@ -4866,7 +4866,7 @@
                 </a:solidFill>
                 <a:latin typeface="Inter"/>
               </a:rPr>
-              <a:t>Правила охраны газораспределительных сетей (ПП РФ № 878): охранная зона, ограничения для земляных работ.</a:t>
+              <a:t>Охранные зоны: 2 м от наружных газопроводов; ограничения на строительство и земляные работы (ПП РФ № 878, п. 7, 14).</a:t>
             </a:r>
           </a:p>
         </p:txBody>
@@ -4936,7 +4936,7 @@
                 </a:solidFill>
                 <a:latin typeface="Inter"/>
               </a:rPr>
-              <a:t>Действия при повреждении газопровода третьими лицами; аварийно-диспетчерское обеспечение.</a:t>
+              <a:t>При повреждении газопровода — аварийно-восстановительные работы по ПМЛА (ФНП № 531, п. 139).</a:t>
             </a:r>
           </a:p>
         </p:txBody>
@@ -5537,7 +5537,7 @@
                 </a:solidFill>
                 <a:latin typeface="Inter"/>
               </a:rPr>
-              <a:t>Требования к сварщикам и технологии сварки на ОПО; допуск к газоопасным сварочным работам.</a:t>
+              <a:t>Сварка — по ПТД, аттестованные сварщики, допускные швы на объекте (ФНП № 519, п. 9, 18, 32).</a:t>
             </a:r>
           </a:p>
         </p:txBody>
@@ -5607,7 +5607,7 @@
                 </a:solidFill>
                 <a:latin typeface="Inter"/>
               </a:rPr>
-              <a:t>Визуальный и неразрушающий контроль сварных швов; оформление результатов контроля.</a:t>
+              <a:t>НК сварных соединений — входной, операционный, приемочный контроль (ФНП № 519, п. 34–38).</a:t>
             </a:r>
           </a:p>
         </p:txBody>
@@ -5677,7 +5677,7 @@
                 </a:solidFill>
                 <a:latin typeface="Inter"/>
               </a:rPr>
-              <a:t>Запрет эксплуатации газопроводов с дефектными сварными соединениями.</a:t>
+              <a:t>На действующих газопроводах — сварка при 0,0004–0,002 МПа; без отключения и заглушек в колодцах запрещено (ФНП № 531, п. 155–156).</a:t>
             </a:r>
           </a:p>
         </p:txBody>
@@ -5747,7 +5747,7 @@
                 </a:solidFill>
                 <a:latin typeface="Inter"/>
               </a:rPr>
-              <a:t>Ремонт дефектов: повторная сварка, выборочная замена участков по результатам контроля.</a:t>
+              <a:t>Сварные швы в стенах и перекрытиях при СМР запрещены (ТР п. 59).</a:t>
             </a:r>
           </a:p>
         </p:txBody>
@@ -5991,7 +5991,7 @@
                 </a:solidFill>
                 <a:latin typeface="Inter"/>
               </a:rPr>
-              <a:t>После СМР и ремонта — испытания по проекту; при отсутствии проектных требований — по СП.</a:t>
+              <a:t>После сварки — испытания на прочность и герметичность; после ремонта — на герметичность (ФНП № 531, п. 29).</a:t>
             </a:r>
           </a:p>
         </p:txBody>
@@ -6061,7 +6061,7 @@
                 </a:solidFill>
                 <a:latin typeface="Inter"/>
               </a:rPr>
-              <a:t>Испытание на прочность и герметичность после сварочных работ обязательно.</a:t>
+              <a:t>Контрольная опрессовка: наружные газопроводы — 0,02 МПа; ГРП/ГРУ — 0,01 МПа (ФНП № 531, п. 151).</a:t>
             </a:r>
           </a:p>
         </p:txBody>
@@ -6131,7 +6131,7 @@
                 </a:solidFill>
                 <a:latin typeface="Inter"/>
               </a:rPr>
-              <a:t>Контрольная опрессовка оборудования и газопроводов ГРП давлением 0,01 МПа.</a:t>
+              <a:t>ПЭ-трубы: испытания не ранее чем через 24 ч после сварки последнего стыка (ТР п. 62).</a:t>
             </a:r>
           </a:p>
         </p:txBody>
@@ -6201,7 +6201,7 @@
                 </a:solidFill>
                 <a:latin typeface="Inter"/>
               </a:rPr>
-              <a:t>Оформление актов испытаний; допуск к пуску газа только после положительных результатов.</a:t>
+              <a:t>Пуск газа — только после положительных испытаний и записи в наряд-допуске.</a:t>
             </a:r>
           </a:p>
         </p:txBody>
@@ -6480,7 +6480,7 @@
                 </a:solidFill>
                 <a:latin typeface="Inter"/>
               </a:rPr>
-              <a:t>Пуск газа выполняется по плану после продувки, проверки герметичности запорной арматуры и отсутствия заглушек. Снятие заглушек — после обхода, ТО и испытаний. Приёмка законченного строительством объекта — комиссией с оформлением актов и внесением сведений в реестр.</a:t>
+              <a:t>Присоединение вновь построенных газопроводов — только перед пуском газа; перед присоединением — осмотр и контрольная опрессовка (ФНП № 531, п. 150). Продувка газом до вытеснения воздуха; окончание — анализ и сжигание проб (ФНП № 531, п. 165). Приёмка — комиссией с представителем Ростехнадзора (ТР п. 93).</a:t>
             </a:r>
           </a:p>
         </p:txBody>
@@ -6515,7 +6515,7 @@
                 </a:solidFill>
                 <a:latin typeface="Inter"/>
               </a:rPr>
-              <a:t>Ввод в эксплуатацию без паспортов, исполнительной документации и актов испытаний не допускается.</a:t>
+              <a:t>Ввод без паспортов, исполнительной документации, протоколов испытаний и актов приёмки не допускается.</a:t>
             </a:r>
           </a:p>
         </p:txBody>
@@ -8373,7 +8373,7 @@
                 </a:solidFill>
                 <a:latin typeface="Inter"/>
               </a:rPr>
-              <a:t>116-ФЗ «О промышленной безопасности опасных производственных объектов» — цели, принципы, категории ОПО.</a:t>
+              <a:t>116-ФЗ — правовые основы ПБ ОПО; аттестация по Б.7.5 (ПП РФ № 2168, № 978) не реже 1 раза в 5 лет (ст. 14.1).</a:t>
             </a:r>
           </a:p>
         </p:txBody>
@@ -8443,7 +8443,7 @@
                 </a:solidFill>
                 <a:latin typeface="Inter"/>
               </a:rPr>
-              <a:t>Постановление Правительства РФ № 2168 — категории работников, подлежащих аттестации.</a:t>
+              <a:t>Ростехнадзор — государственный контроль (надзор) при СМР, реконструкции, капремонте (ПП РФ № 870, п. 2, 88).</a:t>
             </a:r>
           </a:p>
         </p:txBody>
@@ -8513,7 +8513,7 @@
                 </a:solidFill>
                 <a:latin typeface="Inter"/>
               </a:rPr>
-              <a:t>Положение об аттестации (ПП РФ № 978) — порядок подготовки и проверки знаний.</a:t>
+              <a:t>Производственный контроль: программа, ответственные лица, хранение документации (ФНП № 531, п. 5–6).</a:t>
             </a:r>
           </a:p>
         </p:txBody>
@@ -8583,7 +8583,7 @@
                 </a:solidFill>
                 <a:latin typeface="Inter"/>
               </a:rPr>
-              <a:t>Ответственность за нарушение требований промышленной безопасности (административная и уголовная).</a:t>
+              <a:t>ФНП № 531 — требования на всех этапах жизненного цикла сетей газораспределения и газопотребления.</a:t>
             </a:r>
           </a:p>
         </p:txBody>
@@ -8827,7 +8827,7 @@
                 </a:solidFill>
                 <a:latin typeface="Inter"/>
               </a:rPr>
-              <a:t>Производственный контроль: цели, программа, документирование результатов.</a:t>
+              <a:t>Производственный контроль и назначение ответственных лиц (ФНП № 531, п. 5–6).</a:t>
             </a:r>
           </a:p>
         </p:txBody>
@@ -8897,7 +8897,7 @@
                 </a:solidFill>
                 <a:latin typeface="Inter"/>
               </a:rPr>
-              <a:t>Контрольно-надзорная деятельность Ростехнадзора при строительстве и реконструкции сетей.</a:t>
+              <a:t>Идентификация объектов: проект, экспертиза, разрешение на строительство, акт приёмки (ТР п. 12–13).</a:t>
             </a:r>
           </a:p>
         </p:txBody>
@@ -8967,7 +8967,7 @@
                 </a:solidFill>
                 <a:latin typeface="Inter"/>
               </a:rPr>
-              <a:t>Регистрация объектов в государственном реестре ОПО; декларирование промышленной безопасности.</a:t>
+              <a:t>Экспертиза промышленной безопасности; регистрация ОПО в государственном реестре.</a:t>
             </a:r>
           </a:p>
         </p:txBody>
@@ -9037,7 +9037,7 @@
                 </a:solidFill>
                 <a:latin typeface="Inter"/>
               </a:rPr>
-              <a:t>Общие требования ФНП № 531 к организациям, выполняющим работы на сетях газораспределения и газопотребления.</a:t>
+              <a:t>Общие требования ФНП № 531 к организациям на объектах газораспределения и газопотребления.</a:t>
             </a:r>
           </a:p>
         </p:txBody>
@@ -9638,7 +9638,7 @@
                 </a:solidFill>
                 <a:latin typeface="Inter"/>
               </a:rPr>
-              <a:t>Классификация сетей газораспределения и газопотребления по давлению, назначению и способу прокладки.</a:t>
+              <a:t>В проектной документации указываются границы охранных зон (ТР п. 18); маркировка трасс — опознавательные знаки (ТР п. 17).</a:t>
             </a:r>
           </a:p>
         </p:txBody>
@@ -9708,7 +9708,7 @@
                 </a:solidFill>
                 <a:latin typeface="Inter"/>
               </a:rPr>
-              <a:t>Выбор материалов труб (сталь, полиэтилен) с учётом давления, среды и условий прокладки.</a:t>
+              <a:t>Расстояния от газопроводов до зданий и сооружений — с учётом давления и плотности застройки (ТР п. 26).</a:t>
             </a:r>
           </a:p>
         </p:txBody>
@@ -9778,7 +9778,7 @@
                 </a:solidFill>
                 <a:latin typeface="Inter"/>
               </a:rPr>
-              <a:t>Расстояния до зданий, сооружений и инженерных коммуникаций; пересечения и параллельное следование.</a:t>
+              <a:t>Запрет прокладки по помещениям кат. А и Б, по горючим мостам (ТР п. 28).</a:t>
             </a:r>
           </a:p>
         </p:txBody>
@@ -9848,7 +9848,7 @@
                 </a:solidFill>
                 <a:latin typeface="Inter"/>
               </a:rPr>
-              <a:t>Охранные зоны газопроводов; требования к маркировке и сигнальным знакам на трассе.</a:t>
+              <a:t>Охранные зоны: 2 м от наружных газопроводов, 10 м от отдельно стоящих ГРП (ПП РФ № 878, п. 7).</a:t>
             </a:r>
           </a:p>
         </p:txBody>
@@ -10127,7 +10127,7 @@
                 </a:solidFill>
                 <a:latin typeface="Inter"/>
               </a:rPr>
-              <a:t>Проектом определяются тип ГРП/ГРУ, схема подключения, резервирование, система отопления и вентиляции помещений, газоопасные сигнализаторы, аварийное отключение и освещение. Внутренние газопроводы проектируются с учётом давления, категории помещений и требований взрывобезопасности.</a:t>
+              <a:t>Конструкции зданий ГРП должны обеспечивать взрывоустойчивость, I–II степень огнестойкости, класс С0; оснащение молниезащитой, заземлением и вентиляцией (ТР п. 35). Давление газа на входе в ГРУ — не более 0,6 МПа; размещение в помещениях кат. А и Б запрещено (ТР п. 42–43). Внутренние газопроводы — не в подвалах, не через лифтовые шахты (ТР п. 46).</a:t>
             </a:r>
           </a:p>
         </p:txBody>
@@ -10162,7 +10162,7 @@
                 </a:solidFill>
                 <a:latin typeface="Inter"/>
               </a:rPr>
-              <a:t>После строительства на каждый газопровод, ГРП и технологическую установку оформляется паспорт (ФНП № 531).</a:t>
+              <a:t>На каждый газопровод, ПРГ, ГРУ оформляется паспорт (ФНП № 531, п. 16). Экспертиза проекта обязательна (ТР п. 88–91).</a:t>
             </a:r>
           </a:p>
         </p:txBody>

--- a/Б.7.5_Проектирование_строительство_газовых_сетей.pptx
+++ b/Б.7.5_Проектирование_строительство_газовых_сетей.pptx
@@ -20,10 +20,6 @@
     <p:sldId id="268" r:id="rId4"/>
     <p:sldId id="269" r:id="rId3"/>
     <p:sldId id="270" r:id="rId2"/>
-    <p:sldId id="271" r:id="rId21"/>
-    <p:sldId id="272" r:id="rId22"/>
-    <p:sldId id="273" r:id="rId23"/>
-    <p:sldId id="274" r:id="rId24"/>
   </p:sldIdLst>
   <p:sldSz cx="12192000" cy="6858000"/>
   <p:notesSz cx="6858000" cy="9144000"/>
@@ -3322,7 +3318,7 @@
                 </a:solidFill>
                 <a:latin typeface="Inter"/>
               </a:rPr>
-              <a:t>Программа повышения квалификации · 24 академических часа · 4 модуля</a:t>
+              <a:t>Программа повышения квалификации · 24 академических часа · 3 модуля</a:t>
             </a:r>
           </a:p>
         </p:txBody>
@@ -3435,7 +3431,7 @@
                 </a:solidFill>
                 <a:latin typeface="Inter"/>
               </a:rPr>
-              <a:t>01 / 19</a:t>
+              <a:t>01 / 15</a:t>
             </a:r>
           </a:p>
         </p:txBody>
@@ -3792,7 +3788,7 @@
                 </a:solidFill>
                 <a:latin typeface="Inter"/>
               </a:rPr>
-              <a:t>10 / 19</a:t>
+              <a:t>10 / 15</a:t>
             </a:r>
           </a:p>
         </p:txBody>
@@ -4028,7 +4024,7 @@
                 </a:solidFill>
                 <a:latin typeface="Inter"/>
               </a:rPr>
-              <a:t>Сварка при СМР: герметичность, запрет швов в стенах, НК аттестованным контролёром (ТР п. 58–60).</a:t>
+              <a:t>Материалы и технологии — по проекту; исполнительная документация отражает фактически выполненные работы (ТР п. 56–57).</a:t>
             </a:r>
           </a:p>
         </p:txBody>
@@ -4098,7 +4094,7 @@
                 </a:solidFill>
                 <a:latin typeface="Inter"/>
               </a:rPr>
-              <a:t>Газоопасные работы: врезка, пуск газа, снятие заглушек, сварка на действующих газопроводах (ФНП № 531, п. 129).</a:t>
+              <a:t>Технический надзор Ростехнадзора при строительстве, реконструкции и капремонте (ТР п. 2, 88).</a:t>
             </a:r>
           </a:p>
         </p:txBody>
@@ -4246,7 +4242,7 @@
                 </a:solidFill>
                 <a:latin typeface="Inter"/>
               </a:rPr>
-              <a:t>11 / 19</a:t>
+              <a:t>11 / 15</a:t>
             </a:r>
           </a:p>
         </p:txBody>
@@ -4447,7 +4443,7 @@
                 </a:solidFill>
                 <a:latin typeface="Inter"/>
               </a:rPr>
-              <a:t>Перед ремонтом оборудование отключается от действующих газопроводов с установкой заглушки после запорной арматуры (ФНП № 531, п. 40). После ремонта — испытания по проекту (ФНП № 531, п. 41). Консервация — по проекту с уведомлением Ростехнадзора (ТР п. 81–85). Снятие заглушек — после испытаний на прочность и герметичность (ФНП № 531, п. 50).</a:t>
+              <a:t>Капитальный ремонт и техническое перевооружение выполняются на основании проектной документации (ФНП № 531, п. 2–4). Консервация — по проекту с уведомлением Ростехнадзора (ТР п. 81–85). Приёмка объекта — приемочной комиссией с представителем Ростехнадзора (ТР п. 93). К материалам идентификации относятся проект, экспертиза, исполнительная документация, акт приёмки, разрешение на ввод (ТР п. 12–13).</a:t>
             </a:r>
           </a:p>
         </p:txBody>
@@ -4482,7 +4478,7 @@
                 </a:solidFill>
                 <a:latin typeface="Inter"/>
               </a:rPr>
-              <a:t>Ввод в эксплуатацию без испытаний и исполнительной документации не допускается (ТР п. 61).</a:t>
+              <a:t>Ввод в эксплуатацию без исполнительной документации и акта приёмки не допускается.</a:t>
             </a:r>
           </a:p>
         </p:txBody>
@@ -4560,7 +4556,7 @@
                 </a:solidFill>
                 <a:latin typeface="Inter"/>
               </a:rPr>
-              <a:t>12 / 19</a:t>
+              <a:t>12 / 15</a:t>
             </a:r>
           </a:p>
         </p:txBody>
@@ -4656,7 +4652,7 @@
                 </a:solidFill>
                 <a:latin typeface="Inter"/>
               </a:rPr>
-              <a:t>Газоопасные работы и охрана газопроводов</a:t>
+              <a:t>Технический надзор и охранные зоны при СМР</a:t>
             </a:r>
           </a:p>
         </p:txBody>
@@ -4726,7 +4722,7 @@
                 </a:solidFill>
                 <a:latin typeface="Inter"/>
               </a:rPr>
-              <a:t>Газоопасные работы — по наряду-допуску; перечень утверждается руководителем (ФНП № 531, п. 129, 132–133).</a:t>
+              <a:t>Государственный контроль (надзор) Ростехнадзора при СМР, реконструкции и капремонте (ТР п. 2, 88).</a:t>
             </a:r>
           </a:p>
         </p:txBody>
@@ -4796,7 +4792,7 @@
                 </a:solidFill>
                 <a:latin typeface="Inter"/>
               </a:rPr>
-              <a:t>Наряд-допуск: срок действия, инструктаж, анализ газовоздушной смеси в колодцах и ПРГ (ФНП № 531, п. 140, 146).</a:t>
+              <a:t>Строительный контроль застройщика: соответствие проекту, качество материалов, исполнительная документация.</a:t>
             </a:r>
           </a:p>
         </p:txBody>
@@ -5014,7 +5010,7 @@
                 </a:solidFill>
                 <a:latin typeface="Inter"/>
               </a:rPr>
-              <a:t>13 / 19</a:t>
+              <a:t>13 / 15</a:t>
             </a:r>
           </a:p>
         </p:txBody>
@@ -5082,44 +5078,36 @@
       </p:sp>
       <p:sp>
         <p:nvSpPr>
-          <p:cNvPr id="3" name="Oval 2"/>
-          <p:cNvSpPr/>
-          <p:nvPr/>
-        </p:nvSpPr>
-        <p:spPr>
-          <a:xfrm>
-            <a:off x="9753600" y="-457200"/>
-            <a:ext cx="2743200" cy="2743200"/>
-          </a:xfrm>
-          <a:prstGeom prst="ellipse">
-            <a:avLst/>
-          </a:prstGeom>
-          <a:solidFill>
-            <a:srgbClr val="FEF3C7"/>
-          </a:solidFill>
-          <a:ln>
-            <a:noFill/>
-          </a:ln>
-        </p:spPr>
-        <p:style>
-          <a:lnRef idx="1">
-            <a:schemeClr val="accent1"/>
-          </a:lnRef>
-          <a:fillRef idx="3">
-            <a:schemeClr val="accent1"/>
-          </a:fillRef>
-          <a:effectRef idx="2">
-            <a:schemeClr val="accent1"/>
-          </a:effectRef>
-          <a:fontRef idx="minor">
-            <a:schemeClr val="lt1"/>
-          </a:fontRef>
-        </p:style>
-        <p:txBody>
-          <a:bodyPr rtlCol="0" anchor="ctr"/>
-          <a:lstStyle/>
-          <a:p>
-            <a:pPr algn="ctr"/>
+          <p:cNvPr id="3" name="TextBox 2"/>
+          <p:cNvSpPr txBox="1"/>
+          <p:nvPr/>
+        </p:nvSpPr>
+        <p:spPr>
+          <a:xfrm>
+            <a:off x="640080" y="731520"/>
+            <a:ext cx="4572000" cy="228600"/>
+          </a:xfrm>
+          <a:prstGeom prst="rect">
+            <a:avLst/>
+          </a:prstGeom>
+          <a:noFill/>
+        </p:spPr>
+        <p:txBody>
+          <a:bodyPr wrap="square" anchor="t">
+            <a:spAutoFit/>
+          </a:bodyPr>
+          <a:lstStyle/>
+          <a:p>
+            <a:pPr algn="l"/>
+            <a:r>
+              <a:rPr sz="1400" b="1">
+                <a:solidFill>
+                  <a:srgbClr val="E30613"/>
+                </a:solidFill>
+                <a:latin typeface="Inter"/>
+              </a:rPr>
+              <a:t>Итоги курса</a:t>
+            </a:r>
           </a:p>
         </p:txBody>
       </p:sp>
@@ -5131,64 +5119,64 @@
         </p:nvSpPr>
         <p:spPr>
           <a:xfrm>
-            <a:off x="640080" y="731520"/>
-            <a:ext cx="3200400" cy="365760"/>
-          </a:xfrm>
-          <a:prstGeom prst="rect">
-            <a:avLst/>
-          </a:prstGeom>
-          <a:noFill/>
-        </p:spPr>
-        <p:txBody>
-          <a:bodyPr wrap="square" anchor="t">
-            <a:spAutoFit/>
-          </a:bodyPr>
-          <a:lstStyle/>
-          <a:p>
-            <a:pPr algn="l"/>
-            <a:r>
-              <a:rPr sz="1400" b="1">
+            <a:off x="640080" y="1005840"/>
+            <a:ext cx="10911535" cy="914400"/>
+          </a:xfrm>
+          <a:prstGeom prst="rect">
+            <a:avLst/>
+          </a:prstGeom>
+          <a:noFill/>
+        </p:spPr>
+        <p:txBody>
+          <a:bodyPr wrap="square" anchor="t">
+            <a:spAutoFit/>
+          </a:bodyPr>
+          <a:lstStyle/>
+          <a:p>
+            <a:pPr algn="l"/>
+            <a:r>
+              <a:rPr sz="2200" b="1">
+                <a:solidFill>
+                  <a:srgbClr val="1A1A1A"/>
+                </a:solidFill>
+                <a:latin typeface="Inter"/>
+              </a:rPr>
+              <a:t>Ключевые положения программы Б.7.5 (1/2)</a:t>
+            </a:r>
+          </a:p>
+        </p:txBody>
+      </p:sp>
+      <p:sp>
+        <p:nvSpPr>
+          <p:cNvPr id="5" name="TextBox 4"/>
+          <p:cNvSpPr txBox="1"/>
+          <p:nvPr/>
+        </p:nvSpPr>
+        <p:spPr>
+          <a:xfrm>
+            <a:off x="640080" y="2286000"/>
+            <a:ext cx="3474720" cy="365760"/>
+          </a:xfrm>
+          <a:prstGeom prst="rect">
+            <a:avLst/>
+          </a:prstGeom>
+          <a:noFill/>
+        </p:spPr>
+        <p:txBody>
+          <a:bodyPr wrap="square" anchor="t">
+            <a:spAutoFit/>
+          </a:bodyPr>
+          <a:lstStyle/>
+          <a:p>
+            <a:pPr algn="l"/>
+            <a:r>
+              <a:rPr sz="1300" b="1">
                 <a:solidFill>
                   <a:srgbClr val="E30613"/>
                 </a:solidFill>
                 <a:latin typeface="Inter"/>
               </a:rPr>
-              <a:t>МОДУЛЬ 4</a:t>
-            </a:r>
-          </a:p>
-        </p:txBody>
-      </p:sp>
-      <p:sp>
-        <p:nvSpPr>
-          <p:cNvPr id="5" name="TextBox 4"/>
-          <p:cNvSpPr txBox="1"/>
-          <p:nvPr/>
-        </p:nvSpPr>
-        <p:spPr>
-          <a:xfrm>
-            <a:off x="640080" y="1188720"/>
-            <a:ext cx="10911535" cy="640080"/>
-          </a:xfrm>
-          <a:prstGeom prst="rect">
-            <a:avLst/>
-          </a:prstGeom>
-          <a:noFill/>
-        </p:spPr>
-        <p:txBody>
-          <a:bodyPr wrap="square" anchor="t">
-            <a:spAutoFit/>
-          </a:bodyPr>
-          <a:lstStyle/>
-          <a:p>
-            <a:pPr algn="l"/>
-            <a:r>
-              <a:rPr sz="2600" b="1">
-                <a:solidFill>
-                  <a:srgbClr val="1A1A1A"/>
-                </a:solidFill>
-                <a:latin typeface="Inter"/>
-              </a:rPr>
-              <a:t>Сварка, испытания, пуск газа и приёмка</a:t>
+              <a:t>Правовые основы</a:t>
             </a:r>
           </a:p>
         </p:txBody>
@@ -5201,29 +5189,29 @@
         </p:nvSpPr>
         <p:spPr>
           <a:xfrm>
-            <a:off x="640080" y="1920240"/>
-            <a:ext cx="10911535" cy="457200"/>
-          </a:xfrm>
-          <a:prstGeom prst="rect">
-            <a:avLst/>
-          </a:prstGeom>
-          <a:noFill/>
-        </p:spPr>
-        <p:txBody>
-          <a:bodyPr wrap="square" anchor="t">
-            <a:spAutoFit/>
-          </a:bodyPr>
-          <a:lstStyle/>
-          <a:p>
-            <a:pPr algn="l"/>
-            <a:r>
-              <a:rPr sz="1600" b="0">
+            <a:off x="4480560" y="2286000"/>
+            <a:ext cx="7071055" cy="640080"/>
+          </a:xfrm>
+          <a:prstGeom prst="rect">
+            <a:avLst/>
+          </a:prstGeom>
+          <a:noFill/>
+        </p:spPr>
+        <p:txBody>
+          <a:bodyPr wrap="square" anchor="t">
+            <a:spAutoFit/>
+          </a:bodyPr>
+          <a:lstStyle/>
+          <a:p>
+            <a:pPr algn="l"/>
+            <a:r>
+              <a:rPr sz="1200" b="0">
                 <a:solidFill>
                   <a:srgbClr val="6B7280"/>
                 </a:solidFill>
                 <a:latin typeface="Inter"/>
               </a:rPr>
-              <a:t>Контроль качества и ввод в эксплуатацию</a:t>
+              <a:t>116-ФЗ, аттестация по Б.7.5, производственный контроль и надзор Ростехнадзора.</a:t>
             </a:r>
           </a:p>
         </p:txBody>
@@ -5236,36 +5224,141 @@
         </p:nvSpPr>
         <p:spPr>
           <a:xfrm>
-            <a:off x="640080" y="2468880"/>
-            <a:ext cx="10911535" cy="640080"/>
-          </a:xfrm>
-          <a:prstGeom prst="rect">
-            <a:avLst/>
-          </a:prstGeom>
-          <a:noFill/>
-        </p:spPr>
-        <p:txBody>
-          <a:bodyPr wrap="square" anchor="t">
-            <a:spAutoFit/>
-          </a:bodyPr>
-          <a:lstStyle/>
-          <a:p>
-            <a:pPr algn="l"/>
-            <a:r>
-              <a:rPr sz="1400" b="0">
+            <a:off x="640080" y="3314700"/>
+            <a:ext cx="3474720" cy="365760"/>
+          </a:xfrm>
+          <a:prstGeom prst="rect">
+            <a:avLst/>
+          </a:prstGeom>
+          <a:noFill/>
+        </p:spPr>
+        <p:txBody>
+          <a:bodyPr wrap="square" anchor="t">
+            <a:spAutoFit/>
+          </a:bodyPr>
+          <a:lstStyle/>
+          <a:p>
+            <a:pPr algn="l"/>
+            <a:r>
+              <a:rPr sz="1300" b="1">
+                <a:solidFill>
+                  <a:srgbClr val="E30613"/>
+                </a:solidFill>
+                <a:latin typeface="Inter"/>
+              </a:rPr>
+              <a:t>Проектирование</a:t>
+            </a:r>
+          </a:p>
+        </p:txBody>
+      </p:sp>
+      <p:sp>
+        <p:nvSpPr>
+          <p:cNvPr id="8" name="TextBox 7"/>
+          <p:cNvSpPr txBox="1"/>
+          <p:nvPr/>
+        </p:nvSpPr>
+        <p:spPr>
+          <a:xfrm>
+            <a:off x="4480560" y="3314700"/>
+            <a:ext cx="7071055" cy="640080"/>
+          </a:xfrm>
+          <a:prstGeom prst="rect">
+            <a:avLst/>
+          </a:prstGeom>
+          <a:noFill/>
+        </p:spPr>
+        <p:txBody>
+          <a:bodyPr wrap="square" anchor="t">
+            <a:spAutoFit/>
+          </a:bodyPr>
+          <a:lstStyle/>
+          <a:p>
+            <a:pPr algn="l"/>
+            <a:r>
+              <a:rPr sz="1200" b="0">
                 <a:solidFill>
                   <a:srgbClr val="6B7280"/>
                 </a:solidFill>
                 <a:latin typeface="Inter"/>
               </a:rPr>
-              <a:t>Сварочные работы, неразрушающий контроль, опрессовка, врезка, продувка, приёмка объекта</a:t>
-            </a:r>
-          </a:p>
-        </p:txBody>
-      </p:sp>
-      <p:sp>
-        <p:nvSpPr>
-          <p:cNvPr id="8" name="Rectangle 7"/>
+              <a:t>ФНП № 531, СП; выбор трасс, материалов, ГРП/ГРУ; экспертиза проектной документации.</a:t>
+            </a:r>
+          </a:p>
+        </p:txBody>
+      </p:sp>
+      <p:sp>
+        <p:nvSpPr>
+          <p:cNvPr id="9" name="TextBox 8"/>
+          <p:cNvSpPr txBox="1"/>
+          <p:nvPr/>
+        </p:nvSpPr>
+        <p:spPr>
+          <a:xfrm>
+            <a:off x="640080" y="4343400"/>
+            <a:ext cx="3474720" cy="365760"/>
+          </a:xfrm>
+          <a:prstGeom prst="rect">
+            <a:avLst/>
+          </a:prstGeom>
+          <a:noFill/>
+        </p:spPr>
+        <p:txBody>
+          <a:bodyPr wrap="square" anchor="t">
+            <a:spAutoFit/>
+          </a:bodyPr>
+          <a:lstStyle/>
+          <a:p>
+            <a:pPr algn="l"/>
+            <a:r>
+              <a:rPr sz="1300" b="1">
+                <a:solidFill>
+                  <a:srgbClr val="E30613"/>
+                </a:solidFill>
+                <a:latin typeface="Inter"/>
+              </a:rPr>
+              <a:t>Строительство и ремонт</a:t>
+            </a:r>
+          </a:p>
+        </p:txBody>
+      </p:sp>
+      <p:sp>
+        <p:nvSpPr>
+          <p:cNvPr id="10" name="TextBox 9"/>
+          <p:cNvSpPr txBox="1"/>
+          <p:nvPr/>
+        </p:nvSpPr>
+        <p:spPr>
+          <a:xfrm>
+            <a:off x="4480560" y="4343400"/>
+            <a:ext cx="7071055" cy="640080"/>
+          </a:xfrm>
+          <a:prstGeom prst="rect">
+            <a:avLst/>
+          </a:prstGeom>
+          <a:noFill/>
+        </p:spPr>
+        <p:txBody>
+          <a:bodyPr wrap="square" anchor="t">
+            <a:spAutoFit/>
+          </a:bodyPr>
+          <a:lstStyle/>
+          <a:p>
+            <a:pPr algn="l"/>
+            <a:r>
+              <a:rPr sz="1200" b="0">
+                <a:solidFill>
+                  <a:srgbClr val="6B7280"/>
+                </a:solidFill>
+                <a:latin typeface="Inter"/>
+              </a:rPr>
+              <a:t>СМР, реконструкция, капремонт, ТПВ, консервация, технический надзор, охранные зоны.</a:t>
+            </a:r>
+          </a:p>
+        </p:txBody>
+      </p:sp>
+      <p:sp>
+        <p:nvSpPr>
+          <p:cNvPr id="11" name="Rectangle 10"/>
           <p:cNvSpPr/>
           <p:nvPr/>
         </p:nvSpPr>
@@ -5308,42 +5401,7 @@
       </p:sp>
       <p:sp>
         <p:nvSpPr>
-          <p:cNvPr id="9" name="TextBox 8"/>
-          <p:cNvSpPr txBox="1"/>
-          <p:nvPr/>
-        </p:nvSpPr>
-        <p:spPr>
-          <a:xfrm>
-            <a:off x="640080" y="5486400"/>
-            <a:ext cx="10911535" cy="365760"/>
-          </a:xfrm>
-          <a:prstGeom prst="rect">
-            <a:avLst/>
-          </a:prstGeom>
-          <a:noFill/>
-        </p:spPr>
-        <p:txBody>
-          <a:bodyPr wrap="square" anchor="t">
-            <a:spAutoFit/>
-          </a:bodyPr>
-          <a:lstStyle/>
-          <a:p>
-            <a:pPr algn="l"/>
-            <a:r>
-              <a:rPr sz="1200" b="0">
-                <a:solidFill>
-                  <a:srgbClr val="6B7280"/>
-                </a:solidFill>
-                <a:latin typeface="Inter"/>
-              </a:rPr>
-              <a:t>Сварка · Испытания · Пуск газа · Приёмка · НК</a:t>
-            </a:r>
-          </a:p>
-        </p:txBody>
-      </p:sp>
-      <p:sp>
-        <p:nvSpPr>
-          <p:cNvPr id="10" name="TextBox 9"/>
+          <p:cNvPr id="12" name="TextBox 11"/>
           <p:cNvSpPr txBox="1"/>
           <p:nvPr/>
         </p:nvSpPr>
@@ -5371,7 +5429,7 @@
                 </a:solidFill>
                 <a:latin typeface="Inter"/>
               </a:rPr>
-              <a:t>14 / 19</a:t>
+              <a:t>14 / 15</a:t>
             </a:r>
           </a:p>
         </p:txBody>
@@ -5446,273 +5504,273 @@
         <p:spPr>
           <a:xfrm>
             <a:off x="640080" y="731520"/>
-            <a:ext cx="10911535" cy="640080"/>
-          </a:xfrm>
-          <a:prstGeom prst="rect">
-            <a:avLst/>
-          </a:prstGeom>
-          <a:noFill/>
-        </p:spPr>
-        <p:txBody>
-          <a:bodyPr wrap="square" anchor="t">
-            <a:spAutoFit/>
-          </a:bodyPr>
-          <a:lstStyle/>
-          <a:p>
-            <a:pPr algn="l"/>
-            <a:r>
-              <a:rPr sz="2400" b="1">
+            <a:ext cx="4572000" cy="228600"/>
+          </a:xfrm>
+          <a:prstGeom prst="rect">
+            <a:avLst/>
+          </a:prstGeom>
+          <a:noFill/>
+        </p:spPr>
+        <p:txBody>
+          <a:bodyPr wrap="square" anchor="t">
+            <a:spAutoFit/>
+          </a:bodyPr>
+          <a:lstStyle/>
+          <a:p>
+            <a:pPr algn="l"/>
+            <a:r>
+              <a:rPr sz="1400" b="1">
+                <a:solidFill>
+                  <a:srgbClr val="E30613"/>
+                </a:solidFill>
+                <a:latin typeface="Inter"/>
+              </a:rPr>
+              <a:t>Итоги курса</a:t>
+            </a:r>
+          </a:p>
+        </p:txBody>
+      </p:sp>
+      <p:sp>
+        <p:nvSpPr>
+          <p:cNvPr id="4" name="TextBox 3"/>
+          <p:cNvSpPr txBox="1"/>
+          <p:nvPr/>
+        </p:nvSpPr>
+        <p:spPr>
+          <a:xfrm>
+            <a:off x="640080" y="1005840"/>
+            <a:ext cx="10911535" cy="914400"/>
+          </a:xfrm>
+          <a:prstGeom prst="rect">
+            <a:avLst/>
+          </a:prstGeom>
+          <a:noFill/>
+        </p:spPr>
+        <p:txBody>
+          <a:bodyPr wrap="square" anchor="t">
+            <a:spAutoFit/>
+          </a:bodyPr>
+          <a:lstStyle/>
+          <a:p>
+            <a:pPr algn="l"/>
+            <a:r>
+              <a:rPr sz="2200" b="1">
                 <a:solidFill>
                   <a:srgbClr val="1A1A1A"/>
                 </a:solidFill>
                 <a:latin typeface="Inter"/>
               </a:rPr>
-              <a:t>Сварочные работы и контроль качества соединений</a:t>
-            </a:r>
-          </a:p>
-        </p:txBody>
-      </p:sp>
-      <p:sp>
-        <p:nvSpPr>
-          <p:cNvPr id="4" name="TextBox 3"/>
-          <p:cNvSpPr txBox="1"/>
-          <p:nvPr/>
-        </p:nvSpPr>
-        <p:spPr>
-          <a:xfrm>
-            <a:off x="640080" y="1650720"/>
-            <a:ext cx="640080" cy="365760"/>
-          </a:xfrm>
-          <a:prstGeom prst="rect">
-            <a:avLst/>
-          </a:prstGeom>
-          <a:noFill/>
-        </p:spPr>
-        <p:txBody>
-          <a:bodyPr wrap="square" anchor="t">
-            <a:spAutoFit/>
-          </a:bodyPr>
-          <a:lstStyle/>
-          <a:p>
-            <a:pPr algn="l"/>
-            <a:r>
-              <a:rPr sz="1400" b="1">
+              <a:t>Ключевые положения программы Б.7.5 (2/2)</a:t>
+            </a:r>
+          </a:p>
+        </p:txBody>
+      </p:sp>
+      <p:sp>
+        <p:nvSpPr>
+          <p:cNvPr id="5" name="TextBox 4"/>
+          <p:cNvSpPr txBox="1"/>
+          <p:nvPr/>
+        </p:nvSpPr>
+        <p:spPr>
+          <a:xfrm>
+            <a:off x="640080" y="2286000"/>
+            <a:ext cx="3474720" cy="365760"/>
+          </a:xfrm>
+          <a:prstGeom prst="rect">
+            <a:avLst/>
+          </a:prstGeom>
+          <a:noFill/>
+        </p:spPr>
+        <p:txBody>
+          <a:bodyPr wrap="square" anchor="t">
+            <a:spAutoFit/>
+          </a:bodyPr>
+          <a:lstStyle/>
+          <a:p>
+            <a:pPr algn="l"/>
+            <a:r>
+              <a:rPr sz="1300" b="1">
                 <a:solidFill>
                   <a:srgbClr val="E30613"/>
                 </a:solidFill>
                 <a:latin typeface="Inter"/>
               </a:rPr>
-              <a:t>01</a:t>
-            </a:r>
-          </a:p>
-        </p:txBody>
-      </p:sp>
-      <p:sp>
-        <p:nvSpPr>
-          <p:cNvPr id="5" name="TextBox 4"/>
-          <p:cNvSpPr txBox="1"/>
-          <p:nvPr/>
-        </p:nvSpPr>
-        <p:spPr>
-          <a:xfrm>
-            <a:off x="1371600" y="1650720"/>
-            <a:ext cx="9539980" cy="640080"/>
-          </a:xfrm>
-          <a:prstGeom prst="rect">
-            <a:avLst/>
-          </a:prstGeom>
-          <a:noFill/>
-        </p:spPr>
-        <p:txBody>
-          <a:bodyPr wrap="square" anchor="t">
-            <a:spAutoFit/>
-          </a:bodyPr>
-          <a:lstStyle/>
-          <a:p>
-            <a:pPr algn="l"/>
-            <a:r>
-              <a:rPr sz="1300" b="0">
+              <a:t>Итоговая аттестация</a:t>
+            </a:r>
+          </a:p>
+        </p:txBody>
+      </p:sp>
+      <p:sp>
+        <p:nvSpPr>
+          <p:cNvPr id="6" name="TextBox 5"/>
+          <p:cNvSpPr txBox="1"/>
+          <p:nvPr/>
+        </p:nvSpPr>
+        <p:spPr>
+          <a:xfrm>
+            <a:off x="4480560" y="2286000"/>
+            <a:ext cx="7071055" cy="640080"/>
+          </a:xfrm>
+          <a:prstGeom prst="rect">
+            <a:avLst/>
+          </a:prstGeom>
+          <a:noFill/>
+        </p:spPr>
+        <p:txBody>
+          <a:bodyPr wrap="square" anchor="t">
+            <a:spAutoFit/>
+          </a:bodyPr>
+          <a:lstStyle/>
+          <a:p>
+            <a:pPr algn="l"/>
+            <a:r>
+              <a:rPr sz="1200" b="0">
                 <a:solidFill>
                   <a:srgbClr val="6B7280"/>
                 </a:solidFill>
                 <a:latin typeface="Inter"/>
               </a:rPr>
-              <a:t>Сварка — по ПТД, аттестованные сварщики, допускные швы на объекте (ФНП № 519, п. 9, 18, 32).</a:t>
-            </a:r>
-          </a:p>
-        </p:txBody>
-      </p:sp>
-      <p:sp>
-        <p:nvSpPr>
-          <p:cNvPr id="6" name="TextBox 5"/>
-          <p:cNvSpPr txBox="1"/>
-          <p:nvPr/>
-        </p:nvSpPr>
-        <p:spPr>
-          <a:xfrm>
-            <a:off x="640080" y="2610720"/>
-            <a:ext cx="640080" cy="365760"/>
-          </a:xfrm>
-          <a:prstGeom prst="rect">
-            <a:avLst/>
-          </a:prstGeom>
-          <a:noFill/>
-        </p:spPr>
-        <p:txBody>
-          <a:bodyPr wrap="square" anchor="t">
-            <a:spAutoFit/>
-          </a:bodyPr>
-          <a:lstStyle/>
-          <a:p>
-            <a:pPr algn="l"/>
-            <a:r>
-              <a:rPr sz="1400" b="1">
+              <a:t>Проверка знаний в Едином портале тестирования Ростехнадзора по области Б.7.5.</a:t>
+            </a:r>
+          </a:p>
+        </p:txBody>
+      </p:sp>
+      <p:sp>
+        <p:nvSpPr>
+          <p:cNvPr id="7" name="TextBox 6"/>
+          <p:cNvSpPr txBox="1"/>
+          <p:nvPr/>
+        </p:nvSpPr>
+        <p:spPr>
+          <a:xfrm>
+            <a:off x="640080" y="3314700"/>
+            <a:ext cx="3474720" cy="365760"/>
+          </a:xfrm>
+          <a:prstGeom prst="rect">
+            <a:avLst/>
+          </a:prstGeom>
+          <a:noFill/>
+        </p:spPr>
+        <p:txBody>
+          <a:bodyPr wrap="square" anchor="t">
+            <a:spAutoFit/>
+          </a:bodyPr>
+          <a:lstStyle/>
+          <a:p>
+            <a:pPr algn="l"/>
+            <a:r>
+              <a:rPr sz="1300" b="1">
                 <a:solidFill>
                   <a:srgbClr val="E30613"/>
                 </a:solidFill>
                 <a:latin typeface="Inter"/>
               </a:rPr>
-              <a:t>02</a:t>
-            </a:r>
-          </a:p>
-        </p:txBody>
-      </p:sp>
-      <p:sp>
-        <p:nvSpPr>
-          <p:cNvPr id="7" name="TextBox 6"/>
-          <p:cNvSpPr txBox="1"/>
-          <p:nvPr/>
-        </p:nvSpPr>
-        <p:spPr>
-          <a:xfrm>
-            <a:off x="1371600" y="2610720"/>
-            <a:ext cx="9539980" cy="640080"/>
-          </a:xfrm>
-          <a:prstGeom prst="rect">
-            <a:avLst/>
-          </a:prstGeom>
-          <a:noFill/>
-        </p:spPr>
-        <p:txBody>
-          <a:bodyPr wrap="square" anchor="t">
-            <a:spAutoFit/>
-          </a:bodyPr>
-          <a:lstStyle/>
-          <a:p>
-            <a:pPr algn="l"/>
-            <a:r>
-              <a:rPr sz="1300" b="0">
+              <a:t>Документ об обучении</a:t>
+            </a:r>
+          </a:p>
+        </p:txBody>
+      </p:sp>
+      <p:sp>
+        <p:nvSpPr>
+          <p:cNvPr id="8" name="TextBox 7"/>
+          <p:cNvSpPr txBox="1"/>
+          <p:nvPr/>
+        </p:nvSpPr>
+        <p:spPr>
+          <a:xfrm>
+            <a:off x="4480560" y="3314700"/>
+            <a:ext cx="7071055" cy="640080"/>
+          </a:xfrm>
+          <a:prstGeom prst="rect">
+            <a:avLst/>
+          </a:prstGeom>
+          <a:noFill/>
+        </p:spPr>
+        <p:txBody>
+          <a:bodyPr wrap="square" anchor="t">
+            <a:spAutoFit/>
+          </a:bodyPr>
+          <a:lstStyle/>
+          <a:p>
+            <a:pPr algn="l"/>
+            <a:r>
+              <a:rPr sz="1200" b="0">
                 <a:solidFill>
                   <a:srgbClr val="6B7280"/>
                 </a:solidFill>
                 <a:latin typeface="Inter"/>
               </a:rPr>
-              <a:t>НК сварных соединений — входной, операционный, приемочный контроль (ФНП № 519, п. 34–38).</a:t>
-            </a:r>
-          </a:p>
-        </p:txBody>
-      </p:sp>
-      <p:sp>
-        <p:nvSpPr>
-          <p:cNvPr id="8" name="TextBox 7"/>
-          <p:cNvSpPr txBox="1"/>
-          <p:nvPr/>
-        </p:nvSpPr>
-        <p:spPr>
-          <a:xfrm>
-            <a:off x="640080" y="3570720"/>
-            <a:ext cx="640080" cy="365760"/>
-          </a:xfrm>
-          <a:prstGeom prst="rect">
-            <a:avLst/>
-          </a:prstGeom>
-          <a:noFill/>
-        </p:spPr>
-        <p:txBody>
-          <a:bodyPr wrap="square" anchor="t">
-            <a:spAutoFit/>
-          </a:bodyPr>
-          <a:lstStyle/>
-          <a:p>
-            <a:pPr algn="l"/>
-            <a:r>
-              <a:rPr sz="1400" b="1">
+              <a:t>Удостоверение о повышении квалификации; срок действия аттестации — 5 лет.</a:t>
+            </a:r>
+          </a:p>
+        </p:txBody>
+      </p:sp>
+      <p:sp>
+        <p:nvSpPr>
+          <p:cNvPr id="9" name="TextBox 8"/>
+          <p:cNvSpPr txBox="1"/>
+          <p:nvPr/>
+        </p:nvSpPr>
+        <p:spPr>
+          <a:xfrm>
+            <a:off x="640080" y="4343400"/>
+            <a:ext cx="3474720" cy="365760"/>
+          </a:xfrm>
+          <a:prstGeom prst="rect">
+            <a:avLst/>
+          </a:prstGeom>
+          <a:noFill/>
+        </p:spPr>
+        <p:txBody>
+          <a:bodyPr wrap="square" anchor="t">
+            <a:spAutoFit/>
+          </a:bodyPr>
+          <a:lstStyle/>
+          <a:p>
+            <a:pPr algn="l"/>
+            <a:r>
+              <a:rPr sz="1300" b="1">
                 <a:solidFill>
                   <a:srgbClr val="E30613"/>
                 </a:solidFill>
                 <a:latin typeface="Inter"/>
               </a:rPr>
-              <a:t>03</a:t>
-            </a:r>
-          </a:p>
-        </p:txBody>
-      </p:sp>
-      <p:sp>
-        <p:nvSpPr>
-          <p:cNvPr id="9" name="TextBox 8"/>
-          <p:cNvSpPr txBox="1"/>
-          <p:nvPr/>
-        </p:nvSpPr>
-        <p:spPr>
-          <a:xfrm>
-            <a:off x="1371600" y="3570720"/>
-            <a:ext cx="9539980" cy="640080"/>
-          </a:xfrm>
-          <a:prstGeom prst="rect">
-            <a:avLst/>
-          </a:prstGeom>
-          <a:noFill/>
-        </p:spPr>
-        <p:txBody>
-          <a:bodyPr wrap="square" anchor="t">
-            <a:spAutoFit/>
-          </a:bodyPr>
-          <a:lstStyle/>
-          <a:p>
-            <a:pPr algn="l"/>
-            <a:r>
-              <a:rPr sz="1300" b="0">
+              <a:t>Периодичность обучения</a:t>
+            </a:r>
+          </a:p>
+        </p:txBody>
+      </p:sp>
+      <p:sp>
+        <p:nvSpPr>
+          <p:cNvPr id="10" name="TextBox 9"/>
+          <p:cNvSpPr txBox="1"/>
+          <p:nvPr/>
+        </p:nvSpPr>
+        <p:spPr>
+          <a:xfrm>
+            <a:off x="4480560" y="4343400"/>
+            <a:ext cx="7071055" cy="640080"/>
+          </a:xfrm>
+          <a:prstGeom prst="rect">
+            <a:avLst/>
+          </a:prstGeom>
+          <a:noFill/>
+        </p:spPr>
+        <p:txBody>
+          <a:bodyPr wrap="square" anchor="t">
+            <a:spAutoFit/>
+          </a:bodyPr>
+          <a:lstStyle/>
+          <a:p>
+            <a:pPr algn="l"/>
+            <a:r>
+              <a:rPr sz="1200" b="0">
                 <a:solidFill>
                   <a:srgbClr val="6B7280"/>
                 </a:solidFill>
                 <a:latin typeface="Inter"/>
               </a:rPr>
-              <a:t>На действующих газопроводах — сварка при 0,0004–0,002 МПа; без отключения и заглушек в колодцах запрещено (ФНП № 531, п. 155–156).</a:t>
-            </a:r>
-          </a:p>
-        </p:txBody>
-      </p:sp>
-      <p:sp>
-        <p:nvSpPr>
-          <p:cNvPr id="10" name="TextBox 9"/>
-          <p:cNvSpPr txBox="1"/>
-          <p:nvPr/>
-        </p:nvSpPr>
-        <p:spPr>
-          <a:xfrm>
-            <a:off x="640080" y="4530720"/>
-            <a:ext cx="640080" cy="365760"/>
-          </a:xfrm>
-          <a:prstGeom prst="rect">
-            <a:avLst/>
-          </a:prstGeom>
-          <a:noFill/>
-        </p:spPr>
-        <p:txBody>
-          <a:bodyPr wrap="square" anchor="t">
-            <a:spAutoFit/>
-          </a:bodyPr>
-          <a:lstStyle/>
-          <a:p>
-            <a:pPr algn="l"/>
-            <a:r>
-              <a:rPr sz="1400" b="1">
-                <a:solidFill>
-                  <a:srgbClr val="E30613"/>
-                </a:solidFill>
-                <a:latin typeface="Inter"/>
-              </a:rPr>
-              <a:t>04</a:t>
+              <a:t>Не реже одного раза в 5 лет (ч. 1 ст. 14.1 116-ФЗ).</a:t>
             </a:r>
           </a:p>
         </p:txBody>
@@ -5725,29 +5783,29 @@
         </p:nvSpPr>
         <p:spPr>
           <a:xfrm>
-            <a:off x="1371600" y="4530720"/>
-            <a:ext cx="9539980" cy="640080"/>
-          </a:xfrm>
-          <a:prstGeom prst="rect">
-            <a:avLst/>
-          </a:prstGeom>
-          <a:noFill/>
-        </p:spPr>
-        <p:txBody>
-          <a:bodyPr wrap="square" anchor="t">
-            <a:spAutoFit/>
-          </a:bodyPr>
-          <a:lstStyle/>
-          <a:p>
-            <a:pPr algn="l"/>
-            <a:r>
-              <a:rPr sz="1300" b="0">
+            <a:off x="640080" y="5221224"/>
+            <a:ext cx="10911535" cy="548640"/>
+          </a:xfrm>
+          <a:prstGeom prst="rect">
+            <a:avLst/>
+          </a:prstGeom>
+          <a:noFill/>
+        </p:spPr>
+        <p:txBody>
+          <a:bodyPr wrap="square" anchor="t">
+            <a:spAutoFit/>
+          </a:bodyPr>
+          <a:lstStyle/>
+          <a:p>
+            <a:pPr algn="l"/>
+            <a:r>
+              <a:rPr sz="1200" b="0">
                 <a:solidFill>
                   <a:srgbClr val="6B7280"/>
                 </a:solidFill>
                 <a:latin typeface="Inter"/>
               </a:rPr>
-              <a:t>Сварные швы в стенах и перекрытиях при СМР запрещены (ТР п. 59).</a:t>
+              <a:t>Соблюдение требований ФНП № 531 на этапах проектирования, строительства и ремонта обеспечивает безопасность сетей газораспределения и газопотребления.</a:t>
             </a:r>
           </a:p>
         </p:txBody>
@@ -5825,1718 +5883,7 @@
                 </a:solidFill>
                 <a:latin typeface="Inter"/>
               </a:rPr>
-              <a:t>15 / 19</a:t>
-            </a:r>
-          </a:p>
-        </p:txBody>
-      </p:sp>
-    </p:spTree>
-  </p:cSld>
-  <p:clrMapOvr>
-    <a:masterClrMapping/>
-  </p:clrMapOvr>
-</p:sld>
-</file>
-
-<file path=ppt/slides/slide16.xml><?xml version="1.0" encoding="utf-8"?>
-<p:sld xmlns:a="http://schemas.openxmlformats.org/drawingml/2006/main" xmlns:p="http://schemas.openxmlformats.org/presentationml/2006/main" xmlns:r="http://schemas.openxmlformats.org/officeDocument/2006/relationships">
-  <p:cSld>
-    <p:spTree>
-      <p:nvGrpSpPr>
-        <p:cNvPr id="1" name=""/>
-        <p:cNvGrpSpPr/>
-        <p:nvPr/>
-      </p:nvGrpSpPr>
-      <p:grpSpPr/>
-      <p:sp>
-        <p:nvSpPr>
-          <p:cNvPr id="2" name="Rectangle 1"/>
-          <p:cNvSpPr/>
-          <p:nvPr/>
-        </p:nvSpPr>
-        <p:spPr>
-          <a:xfrm>
-            <a:off x="0" y="0"/>
-            <a:ext cx="12192000" cy="6858000"/>
-          </a:xfrm>
-          <a:prstGeom prst="rect">
-            <a:avLst/>
-          </a:prstGeom>
-          <a:solidFill>
-            <a:srgbClr val="FAFAFA"/>
-          </a:solidFill>
-          <a:ln>
-            <a:noFill/>
-          </a:ln>
-        </p:spPr>
-        <p:style>
-          <a:lnRef idx="1">
-            <a:schemeClr val="accent1"/>
-          </a:lnRef>
-          <a:fillRef idx="3">
-            <a:schemeClr val="accent1"/>
-          </a:fillRef>
-          <a:effectRef idx="2">
-            <a:schemeClr val="accent1"/>
-          </a:effectRef>
-          <a:fontRef idx="minor">
-            <a:schemeClr val="lt1"/>
-          </a:fontRef>
-        </p:style>
-        <p:txBody>
-          <a:bodyPr rtlCol="0" anchor="ctr"/>
-          <a:lstStyle/>
-          <a:p>
-            <a:pPr algn="ctr"/>
-          </a:p>
-        </p:txBody>
-      </p:sp>
-      <p:sp>
-        <p:nvSpPr>
-          <p:cNvPr id="3" name="TextBox 2"/>
-          <p:cNvSpPr txBox="1"/>
-          <p:nvPr/>
-        </p:nvSpPr>
-        <p:spPr>
-          <a:xfrm>
-            <a:off x="640080" y="731520"/>
-            <a:ext cx="10911535" cy="640080"/>
-          </a:xfrm>
-          <a:prstGeom prst="rect">
-            <a:avLst/>
-          </a:prstGeom>
-          <a:noFill/>
-        </p:spPr>
-        <p:txBody>
-          <a:bodyPr wrap="square" anchor="t">
-            <a:spAutoFit/>
-          </a:bodyPr>
-          <a:lstStyle/>
-          <a:p>
-            <a:pPr algn="l"/>
-            <a:r>
-              <a:rPr sz="2400" b="1">
-                <a:solidFill>
-                  <a:srgbClr val="1A1A1A"/>
-                </a:solidFill>
-                <a:latin typeface="Inter"/>
-              </a:rPr>
-              <a:t>Испытания газопроводов на прочность и герметичность</a:t>
-            </a:r>
-          </a:p>
-        </p:txBody>
-      </p:sp>
-      <p:sp>
-        <p:nvSpPr>
-          <p:cNvPr id="4" name="TextBox 3"/>
-          <p:cNvSpPr txBox="1"/>
-          <p:nvPr/>
-        </p:nvSpPr>
-        <p:spPr>
-          <a:xfrm>
-            <a:off x="640080" y="1650720"/>
-            <a:ext cx="640080" cy="365760"/>
-          </a:xfrm>
-          <a:prstGeom prst="rect">
-            <a:avLst/>
-          </a:prstGeom>
-          <a:noFill/>
-        </p:spPr>
-        <p:txBody>
-          <a:bodyPr wrap="square" anchor="t">
-            <a:spAutoFit/>
-          </a:bodyPr>
-          <a:lstStyle/>
-          <a:p>
-            <a:pPr algn="l"/>
-            <a:r>
-              <a:rPr sz="1400" b="1">
-                <a:solidFill>
-                  <a:srgbClr val="E30613"/>
-                </a:solidFill>
-                <a:latin typeface="Inter"/>
-              </a:rPr>
-              <a:t>01</a:t>
-            </a:r>
-          </a:p>
-        </p:txBody>
-      </p:sp>
-      <p:sp>
-        <p:nvSpPr>
-          <p:cNvPr id="5" name="TextBox 4"/>
-          <p:cNvSpPr txBox="1"/>
-          <p:nvPr/>
-        </p:nvSpPr>
-        <p:spPr>
-          <a:xfrm>
-            <a:off x="1371600" y="1650720"/>
-            <a:ext cx="9539980" cy="640080"/>
-          </a:xfrm>
-          <a:prstGeom prst="rect">
-            <a:avLst/>
-          </a:prstGeom>
-          <a:noFill/>
-        </p:spPr>
-        <p:txBody>
-          <a:bodyPr wrap="square" anchor="t">
-            <a:spAutoFit/>
-          </a:bodyPr>
-          <a:lstStyle/>
-          <a:p>
-            <a:pPr algn="l"/>
-            <a:r>
-              <a:rPr sz="1300" b="0">
-                <a:solidFill>
-                  <a:srgbClr val="6B7280"/>
-                </a:solidFill>
-                <a:latin typeface="Inter"/>
-              </a:rPr>
-              <a:t>После сварки — испытания на прочность и герметичность; после ремонта — на герметичность (ФНП № 531, п. 29).</a:t>
-            </a:r>
-          </a:p>
-        </p:txBody>
-      </p:sp>
-      <p:sp>
-        <p:nvSpPr>
-          <p:cNvPr id="6" name="TextBox 5"/>
-          <p:cNvSpPr txBox="1"/>
-          <p:nvPr/>
-        </p:nvSpPr>
-        <p:spPr>
-          <a:xfrm>
-            <a:off x="640080" y="2610720"/>
-            <a:ext cx="640080" cy="365760"/>
-          </a:xfrm>
-          <a:prstGeom prst="rect">
-            <a:avLst/>
-          </a:prstGeom>
-          <a:noFill/>
-        </p:spPr>
-        <p:txBody>
-          <a:bodyPr wrap="square" anchor="t">
-            <a:spAutoFit/>
-          </a:bodyPr>
-          <a:lstStyle/>
-          <a:p>
-            <a:pPr algn="l"/>
-            <a:r>
-              <a:rPr sz="1400" b="1">
-                <a:solidFill>
-                  <a:srgbClr val="E30613"/>
-                </a:solidFill>
-                <a:latin typeface="Inter"/>
-              </a:rPr>
-              <a:t>02</a:t>
-            </a:r>
-          </a:p>
-        </p:txBody>
-      </p:sp>
-      <p:sp>
-        <p:nvSpPr>
-          <p:cNvPr id="7" name="TextBox 6"/>
-          <p:cNvSpPr txBox="1"/>
-          <p:nvPr/>
-        </p:nvSpPr>
-        <p:spPr>
-          <a:xfrm>
-            <a:off x="1371600" y="2610720"/>
-            <a:ext cx="9539980" cy="640080"/>
-          </a:xfrm>
-          <a:prstGeom prst="rect">
-            <a:avLst/>
-          </a:prstGeom>
-          <a:noFill/>
-        </p:spPr>
-        <p:txBody>
-          <a:bodyPr wrap="square" anchor="t">
-            <a:spAutoFit/>
-          </a:bodyPr>
-          <a:lstStyle/>
-          <a:p>
-            <a:pPr algn="l"/>
-            <a:r>
-              <a:rPr sz="1300" b="0">
-                <a:solidFill>
-                  <a:srgbClr val="6B7280"/>
-                </a:solidFill>
-                <a:latin typeface="Inter"/>
-              </a:rPr>
-              <a:t>Контрольная опрессовка: наружные газопроводы — 0,02 МПа; ГРП/ГРУ — 0,01 МПа (ФНП № 531, п. 151).</a:t>
-            </a:r>
-          </a:p>
-        </p:txBody>
-      </p:sp>
-      <p:sp>
-        <p:nvSpPr>
-          <p:cNvPr id="8" name="TextBox 7"/>
-          <p:cNvSpPr txBox="1"/>
-          <p:nvPr/>
-        </p:nvSpPr>
-        <p:spPr>
-          <a:xfrm>
-            <a:off x="640080" y="3570720"/>
-            <a:ext cx="640080" cy="365760"/>
-          </a:xfrm>
-          <a:prstGeom prst="rect">
-            <a:avLst/>
-          </a:prstGeom>
-          <a:noFill/>
-        </p:spPr>
-        <p:txBody>
-          <a:bodyPr wrap="square" anchor="t">
-            <a:spAutoFit/>
-          </a:bodyPr>
-          <a:lstStyle/>
-          <a:p>
-            <a:pPr algn="l"/>
-            <a:r>
-              <a:rPr sz="1400" b="1">
-                <a:solidFill>
-                  <a:srgbClr val="E30613"/>
-                </a:solidFill>
-                <a:latin typeface="Inter"/>
-              </a:rPr>
-              <a:t>03</a:t>
-            </a:r>
-          </a:p>
-        </p:txBody>
-      </p:sp>
-      <p:sp>
-        <p:nvSpPr>
-          <p:cNvPr id="9" name="TextBox 8"/>
-          <p:cNvSpPr txBox="1"/>
-          <p:nvPr/>
-        </p:nvSpPr>
-        <p:spPr>
-          <a:xfrm>
-            <a:off x="1371600" y="3570720"/>
-            <a:ext cx="9539980" cy="640080"/>
-          </a:xfrm>
-          <a:prstGeom prst="rect">
-            <a:avLst/>
-          </a:prstGeom>
-          <a:noFill/>
-        </p:spPr>
-        <p:txBody>
-          <a:bodyPr wrap="square" anchor="t">
-            <a:spAutoFit/>
-          </a:bodyPr>
-          <a:lstStyle/>
-          <a:p>
-            <a:pPr algn="l"/>
-            <a:r>
-              <a:rPr sz="1300" b="0">
-                <a:solidFill>
-                  <a:srgbClr val="6B7280"/>
-                </a:solidFill>
-                <a:latin typeface="Inter"/>
-              </a:rPr>
-              <a:t>ПЭ-трубы: испытания не ранее чем через 24 ч после сварки последнего стыка (ТР п. 62).</a:t>
-            </a:r>
-          </a:p>
-        </p:txBody>
-      </p:sp>
-      <p:sp>
-        <p:nvSpPr>
-          <p:cNvPr id="10" name="TextBox 9"/>
-          <p:cNvSpPr txBox="1"/>
-          <p:nvPr/>
-        </p:nvSpPr>
-        <p:spPr>
-          <a:xfrm>
-            <a:off x="640080" y="4530720"/>
-            <a:ext cx="640080" cy="365760"/>
-          </a:xfrm>
-          <a:prstGeom prst="rect">
-            <a:avLst/>
-          </a:prstGeom>
-          <a:noFill/>
-        </p:spPr>
-        <p:txBody>
-          <a:bodyPr wrap="square" anchor="t">
-            <a:spAutoFit/>
-          </a:bodyPr>
-          <a:lstStyle/>
-          <a:p>
-            <a:pPr algn="l"/>
-            <a:r>
-              <a:rPr sz="1400" b="1">
-                <a:solidFill>
-                  <a:srgbClr val="E30613"/>
-                </a:solidFill>
-                <a:latin typeface="Inter"/>
-              </a:rPr>
-              <a:t>04</a:t>
-            </a:r>
-          </a:p>
-        </p:txBody>
-      </p:sp>
-      <p:sp>
-        <p:nvSpPr>
-          <p:cNvPr id="11" name="TextBox 10"/>
-          <p:cNvSpPr txBox="1"/>
-          <p:nvPr/>
-        </p:nvSpPr>
-        <p:spPr>
-          <a:xfrm>
-            <a:off x="1371600" y="4530720"/>
-            <a:ext cx="9539980" cy="640080"/>
-          </a:xfrm>
-          <a:prstGeom prst="rect">
-            <a:avLst/>
-          </a:prstGeom>
-          <a:noFill/>
-        </p:spPr>
-        <p:txBody>
-          <a:bodyPr wrap="square" anchor="t">
-            <a:spAutoFit/>
-          </a:bodyPr>
-          <a:lstStyle/>
-          <a:p>
-            <a:pPr algn="l"/>
-            <a:r>
-              <a:rPr sz="1300" b="0">
-                <a:solidFill>
-                  <a:srgbClr val="6B7280"/>
-                </a:solidFill>
-                <a:latin typeface="Inter"/>
-              </a:rPr>
-              <a:t>Пуск газа — только после положительных испытаний и записи в наряд-допуске.</a:t>
-            </a:r>
-          </a:p>
-        </p:txBody>
-      </p:sp>
-      <p:sp>
-        <p:nvSpPr>
-          <p:cNvPr id="12" name="Rectangle 11"/>
-          <p:cNvSpPr/>
-          <p:nvPr/>
-        </p:nvSpPr>
-        <p:spPr>
-          <a:xfrm>
-            <a:off x="640080" y="6355080"/>
-            <a:ext cx="10911535" cy="91440"/>
-          </a:xfrm>
-          <a:prstGeom prst="rect">
-            <a:avLst/>
-          </a:prstGeom>
-          <a:solidFill>
-            <a:srgbClr val="E30613"/>
-          </a:solidFill>
-          <a:ln>
-            <a:noFill/>
-          </a:ln>
-        </p:spPr>
-        <p:style>
-          <a:lnRef idx="1">
-            <a:schemeClr val="accent1"/>
-          </a:lnRef>
-          <a:fillRef idx="3">
-            <a:schemeClr val="accent1"/>
-          </a:fillRef>
-          <a:effectRef idx="2">
-            <a:schemeClr val="accent1"/>
-          </a:effectRef>
-          <a:fontRef idx="minor">
-            <a:schemeClr val="lt1"/>
-          </a:fontRef>
-        </p:style>
-        <p:txBody>
-          <a:bodyPr rtlCol="0" anchor="ctr"/>
-          <a:lstStyle/>
-          <a:p>
-            <a:pPr algn="ctr"/>
-          </a:p>
-        </p:txBody>
-      </p:sp>
-      <p:sp>
-        <p:nvSpPr>
-          <p:cNvPr id="13" name="TextBox 12"/>
-          <p:cNvSpPr txBox="1"/>
-          <p:nvPr/>
-        </p:nvSpPr>
-        <p:spPr>
-          <a:xfrm>
-            <a:off x="10180015" y="6492240"/>
-            <a:ext cx="1188720" cy="228600"/>
-          </a:xfrm>
-          <a:prstGeom prst="rect">
-            <a:avLst/>
-          </a:prstGeom>
-          <a:noFill/>
-        </p:spPr>
-        <p:txBody>
-          <a:bodyPr wrap="square" anchor="t">
-            <a:spAutoFit/>
-          </a:bodyPr>
-          <a:lstStyle/>
-          <a:p>
-            <a:pPr algn="r"/>
-            <a:r>
-              <a:rPr sz="1100" b="0">
-                <a:solidFill>
-                  <a:srgbClr val="6B7280"/>
-                </a:solidFill>
-                <a:latin typeface="Inter"/>
-              </a:rPr>
-              <a:t>16 / 19</a:t>
-            </a:r>
-          </a:p>
-        </p:txBody>
-      </p:sp>
-    </p:spTree>
-  </p:cSld>
-  <p:clrMapOvr>
-    <a:masterClrMapping/>
-  </p:clrMapOvr>
-</p:sld>
-</file>
-
-<file path=ppt/slides/slide17.xml><?xml version="1.0" encoding="utf-8"?>
-<p:sld xmlns:a="http://schemas.openxmlformats.org/drawingml/2006/main" xmlns:p="http://schemas.openxmlformats.org/presentationml/2006/main" xmlns:r="http://schemas.openxmlformats.org/officeDocument/2006/relationships">
-  <p:cSld>
-    <p:spTree>
-      <p:nvGrpSpPr>
-        <p:cNvPr id="1" name=""/>
-        <p:cNvGrpSpPr/>
-        <p:nvPr/>
-      </p:nvGrpSpPr>
-      <p:grpSpPr/>
-      <p:sp>
-        <p:nvSpPr>
-          <p:cNvPr id="2" name="Rectangle 1"/>
-          <p:cNvSpPr/>
-          <p:nvPr/>
-        </p:nvSpPr>
-        <p:spPr>
-          <a:xfrm>
-            <a:off x="0" y="0"/>
-            <a:ext cx="12192000" cy="6858000"/>
-          </a:xfrm>
-          <a:prstGeom prst="rect">
-            <a:avLst/>
-          </a:prstGeom>
-          <a:solidFill>
-            <a:srgbClr val="FAFAFA"/>
-          </a:solidFill>
-          <a:ln>
-            <a:noFill/>
-          </a:ln>
-        </p:spPr>
-        <p:style>
-          <a:lnRef idx="1">
-            <a:schemeClr val="accent1"/>
-          </a:lnRef>
-          <a:fillRef idx="3">
-            <a:schemeClr val="accent1"/>
-          </a:fillRef>
-          <a:effectRef idx="2">
-            <a:schemeClr val="accent1"/>
-          </a:effectRef>
-          <a:fontRef idx="minor">
-            <a:schemeClr val="lt1"/>
-          </a:fontRef>
-        </p:style>
-        <p:txBody>
-          <a:bodyPr rtlCol="0" anchor="ctr"/>
-          <a:lstStyle/>
-          <a:p>
-            <a:pPr algn="ctr"/>
-          </a:p>
-        </p:txBody>
-      </p:sp>
-      <p:sp>
-        <p:nvSpPr>
-          <p:cNvPr id="3" name="TextBox 2"/>
-          <p:cNvSpPr txBox="1"/>
-          <p:nvPr/>
-        </p:nvSpPr>
-        <p:spPr>
-          <a:xfrm>
-            <a:off x="640080" y="731520"/>
-            <a:ext cx="10911535" cy="640080"/>
-          </a:xfrm>
-          <a:prstGeom prst="rect">
-            <a:avLst/>
-          </a:prstGeom>
-          <a:noFill/>
-        </p:spPr>
-        <p:txBody>
-          <a:bodyPr wrap="square" anchor="t">
-            <a:spAutoFit/>
-          </a:bodyPr>
-          <a:lstStyle/>
-          <a:p>
-            <a:pPr algn="l"/>
-            <a:r>
-              <a:rPr sz="2400" b="1">
-                <a:solidFill>
-                  <a:srgbClr val="1A1A1A"/>
-                </a:solidFill>
-                <a:latin typeface="Inter"/>
-              </a:rPr>
-              <a:t>Врезка, продувка, пуск газа и приёмка объекта</a:t>
-            </a:r>
-          </a:p>
-        </p:txBody>
-      </p:sp>
-      <p:sp>
-        <p:nvSpPr>
-          <p:cNvPr id="4" name="TextBox 3"/>
-          <p:cNvSpPr txBox="1"/>
-          <p:nvPr/>
-        </p:nvSpPr>
-        <p:spPr>
-          <a:xfrm>
-            <a:off x="640080" y="1463040"/>
-            <a:ext cx="10911535" cy="365760"/>
-          </a:xfrm>
-          <a:prstGeom prst="rect">
-            <a:avLst/>
-          </a:prstGeom>
-          <a:noFill/>
-        </p:spPr>
-        <p:txBody>
-          <a:bodyPr wrap="square" anchor="t">
-            <a:spAutoFit/>
-          </a:bodyPr>
-          <a:lstStyle/>
-          <a:p>
-            <a:pPr algn="l"/>
-            <a:r>
-              <a:rPr sz="1600" b="0">
-                <a:solidFill>
-                  <a:srgbClr val="6B7280"/>
-                </a:solidFill>
-                <a:latin typeface="Inter"/>
-              </a:rPr>
-              <a:t>Завершающий этап строительства и реконструкции</a:t>
-            </a:r>
-          </a:p>
-        </p:txBody>
-      </p:sp>
-      <p:sp>
-        <p:nvSpPr>
-          <p:cNvPr id="5" name="TextBox 4"/>
-          <p:cNvSpPr txBox="1"/>
-          <p:nvPr/>
-        </p:nvSpPr>
-        <p:spPr>
-          <a:xfrm>
-            <a:off x="640080" y="2103120"/>
-            <a:ext cx="3200400" cy="365760"/>
-          </a:xfrm>
-          <a:prstGeom prst="rect">
-            <a:avLst/>
-          </a:prstGeom>
-          <a:noFill/>
-        </p:spPr>
-        <p:txBody>
-          <a:bodyPr wrap="square" anchor="t">
-            <a:spAutoFit/>
-          </a:bodyPr>
-          <a:lstStyle/>
-          <a:p>
-            <a:pPr algn="l"/>
-            <a:r>
-              <a:rPr sz="1400" b="1">
-                <a:solidFill>
-                  <a:srgbClr val="E30613"/>
-                </a:solidFill>
-                <a:latin typeface="Inter"/>
-              </a:rPr>
-              <a:t>Ввод в эксплуатацию</a:t>
-            </a:r>
-          </a:p>
-        </p:txBody>
-      </p:sp>
-      <p:sp>
-        <p:nvSpPr>
-          <p:cNvPr id="6" name="TextBox 5"/>
-          <p:cNvSpPr txBox="1"/>
-          <p:nvPr/>
-        </p:nvSpPr>
-        <p:spPr>
-          <a:xfrm>
-            <a:off x="640080" y="2552700"/>
-            <a:ext cx="10911535" cy="1280160"/>
-          </a:xfrm>
-          <a:prstGeom prst="rect">
-            <a:avLst/>
-          </a:prstGeom>
-          <a:noFill/>
-        </p:spPr>
-        <p:txBody>
-          <a:bodyPr wrap="square" anchor="t">
-            <a:spAutoFit/>
-          </a:bodyPr>
-          <a:lstStyle/>
-          <a:p>
-            <a:pPr algn="l"/>
-            <a:r>
-              <a:rPr sz="1300" b="0">
-                <a:solidFill>
-                  <a:srgbClr val="6B7280"/>
-                </a:solidFill>
-                <a:latin typeface="Inter"/>
-              </a:rPr>
-              <a:t>Присоединение вновь построенных газопроводов — только перед пуском газа; перед присоединением — осмотр и контрольная опрессовка (ФНП № 531, п. 150). Продувка газом до вытеснения воздуха; окончание — анализ и сжигание проб (ФНП № 531, п. 165). Приёмка — комиссией с представителем Ростехнадзора (ТР п. 93).</a:t>
-            </a:r>
-          </a:p>
-        </p:txBody>
-      </p:sp>
-      <p:sp>
-        <p:nvSpPr>
-          <p:cNvPr id="7" name="TextBox 6"/>
-          <p:cNvSpPr txBox="1"/>
-          <p:nvPr/>
-        </p:nvSpPr>
-        <p:spPr>
-          <a:xfrm>
-            <a:off x="640080" y="4206240"/>
-            <a:ext cx="10911535" cy="640080"/>
-          </a:xfrm>
-          <a:prstGeom prst="rect">
-            <a:avLst/>
-          </a:prstGeom>
-          <a:noFill/>
-        </p:spPr>
-        <p:txBody>
-          <a:bodyPr wrap="square" anchor="t">
-            <a:spAutoFit/>
-          </a:bodyPr>
-          <a:lstStyle/>
-          <a:p>
-            <a:pPr algn="l"/>
-            <a:r>
-              <a:rPr sz="1200" b="0">
-                <a:solidFill>
-                  <a:srgbClr val="F59E0B"/>
-                </a:solidFill>
-                <a:latin typeface="Inter"/>
-              </a:rPr>
-              <a:t>Ввод без паспортов, исполнительной документации, протоколов испытаний и актов приёмки не допускается.</a:t>
-            </a:r>
-          </a:p>
-        </p:txBody>
-      </p:sp>
-      <p:sp>
-        <p:nvSpPr>
-          <p:cNvPr id="8" name="Rectangle 7"/>
-          <p:cNvSpPr/>
-          <p:nvPr/>
-        </p:nvSpPr>
-        <p:spPr>
-          <a:xfrm>
-            <a:off x="640080" y="6355080"/>
-            <a:ext cx="10911535" cy="91440"/>
-          </a:xfrm>
-          <a:prstGeom prst="rect">
-            <a:avLst/>
-          </a:prstGeom>
-          <a:solidFill>
-            <a:srgbClr val="E30613"/>
-          </a:solidFill>
-          <a:ln>
-            <a:noFill/>
-          </a:ln>
-        </p:spPr>
-        <p:style>
-          <a:lnRef idx="1">
-            <a:schemeClr val="accent1"/>
-          </a:lnRef>
-          <a:fillRef idx="3">
-            <a:schemeClr val="accent1"/>
-          </a:fillRef>
-          <a:effectRef idx="2">
-            <a:schemeClr val="accent1"/>
-          </a:effectRef>
-          <a:fontRef idx="minor">
-            <a:schemeClr val="lt1"/>
-          </a:fontRef>
-        </p:style>
-        <p:txBody>
-          <a:bodyPr rtlCol="0" anchor="ctr"/>
-          <a:lstStyle/>
-          <a:p>
-            <a:pPr algn="ctr"/>
-          </a:p>
-        </p:txBody>
-      </p:sp>
-      <p:sp>
-        <p:nvSpPr>
-          <p:cNvPr id="9" name="TextBox 8"/>
-          <p:cNvSpPr txBox="1"/>
-          <p:nvPr/>
-        </p:nvSpPr>
-        <p:spPr>
-          <a:xfrm>
-            <a:off x="10180015" y="6492240"/>
-            <a:ext cx="1188720" cy="228600"/>
-          </a:xfrm>
-          <a:prstGeom prst="rect">
-            <a:avLst/>
-          </a:prstGeom>
-          <a:noFill/>
-        </p:spPr>
-        <p:txBody>
-          <a:bodyPr wrap="square" anchor="t">
-            <a:spAutoFit/>
-          </a:bodyPr>
-          <a:lstStyle/>
-          <a:p>
-            <a:pPr algn="r"/>
-            <a:r>
-              <a:rPr sz="1100" b="0">
-                <a:solidFill>
-                  <a:srgbClr val="6B7280"/>
-                </a:solidFill>
-                <a:latin typeface="Inter"/>
-              </a:rPr>
-              <a:t>17 / 19</a:t>
-            </a:r>
-          </a:p>
-        </p:txBody>
-      </p:sp>
-    </p:spTree>
-  </p:cSld>
-  <p:clrMapOvr>
-    <a:masterClrMapping/>
-  </p:clrMapOvr>
-</p:sld>
-</file>
-
-<file path=ppt/slides/slide18.xml><?xml version="1.0" encoding="utf-8"?>
-<p:sld xmlns:a="http://schemas.openxmlformats.org/drawingml/2006/main" xmlns:p="http://schemas.openxmlformats.org/presentationml/2006/main" xmlns:r="http://schemas.openxmlformats.org/officeDocument/2006/relationships">
-  <p:cSld>
-    <p:spTree>
-      <p:nvGrpSpPr>
-        <p:cNvPr id="1" name=""/>
-        <p:cNvGrpSpPr/>
-        <p:nvPr/>
-      </p:nvGrpSpPr>
-      <p:grpSpPr/>
-      <p:sp>
-        <p:nvSpPr>
-          <p:cNvPr id="2" name="Rectangle 1"/>
-          <p:cNvSpPr/>
-          <p:nvPr/>
-        </p:nvSpPr>
-        <p:spPr>
-          <a:xfrm>
-            <a:off x="0" y="0"/>
-            <a:ext cx="12192000" cy="6858000"/>
-          </a:xfrm>
-          <a:prstGeom prst="rect">
-            <a:avLst/>
-          </a:prstGeom>
-          <a:solidFill>
-            <a:srgbClr val="FAFAFA"/>
-          </a:solidFill>
-          <a:ln>
-            <a:noFill/>
-          </a:ln>
-        </p:spPr>
-        <p:style>
-          <a:lnRef idx="1">
-            <a:schemeClr val="accent1"/>
-          </a:lnRef>
-          <a:fillRef idx="3">
-            <a:schemeClr val="accent1"/>
-          </a:fillRef>
-          <a:effectRef idx="2">
-            <a:schemeClr val="accent1"/>
-          </a:effectRef>
-          <a:fontRef idx="minor">
-            <a:schemeClr val="lt1"/>
-          </a:fontRef>
-        </p:style>
-        <p:txBody>
-          <a:bodyPr rtlCol="0" anchor="ctr"/>
-          <a:lstStyle/>
-          <a:p>
-            <a:pPr algn="ctr"/>
-          </a:p>
-        </p:txBody>
-      </p:sp>
-      <p:sp>
-        <p:nvSpPr>
-          <p:cNvPr id="3" name="TextBox 2"/>
-          <p:cNvSpPr txBox="1"/>
-          <p:nvPr/>
-        </p:nvSpPr>
-        <p:spPr>
-          <a:xfrm>
-            <a:off x="640080" y="731520"/>
-            <a:ext cx="4572000" cy="228600"/>
-          </a:xfrm>
-          <a:prstGeom prst="rect">
-            <a:avLst/>
-          </a:prstGeom>
-          <a:noFill/>
-        </p:spPr>
-        <p:txBody>
-          <a:bodyPr wrap="square" anchor="t">
-            <a:spAutoFit/>
-          </a:bodyPr>
-          <a:lstStyle/>
-          <a:p>
-            <a:pPr algn="l"/>
-            <a:r>
-              <a:rPr sz="1400" b="1">
-                <a:solidFill>
-                  <a:srgbClr val="E30613"/>
-                </a:solidFill>
-                <a:latin typeface="Inter"/>
-              </a:rPr>
-              <a:t>Итоги курса</a:t>
-            </a:r>
-          </a:p>
-        </p:txBody>
-      </p:sp>
-      <p:sp>
-        <p:nvSpPr>
-          <p:cNvPr id="4" name="TextBox 3"/>
-          <p:cNvSpPr txBox="1"/>
-          <p:nvPr/>
-        </p:nvSpPr>
-        <p:spPr>
-          <a:xfrm>
-            <a:off x="640080" y="1005840"/>
-            <a:ext cx="10911535" cy="914400"/>
-          </a:xfrm>
-          <a:prstGeom prst="rect">
-            <a:avLst/>
-          </a:prstGeom>
-          <a:noFill/>
-        </p:spPr>
-        <p:txBody>
-          <a:bodyPr wrap="square" anchor="t">
-            <a:spAutoFit/>
-          </a:bodyPr>
-          <a:lstStyle/>
-          <a:p>
-            <a:pPr algn="l"/>
-            <a:r>
-              <a:rPr sz="2200" b="1">
-                <a:solidFill>
-                  <a:srgbClr val="1A1A1A"/>
-                </a:solidFill>
-                <a:latin typeface="Inter"/>
-              </a:rPr>
-              <a:t>Ключевые положения программы Б.7.5 (1/2)</a:t>
-            </a:r>
-          </a:p>
-        </p:txBody>
-      </p:sp>
-      <p:sp>
-        <p:nvSpPr>
-          <p:cNvPr id="5" name="TextBox 4"/>
-          <p:cNvSpPr txBox="1"/>
-          <p:nvPr/>
-        </p:nvSpPr>
-        <p:spPr>
-          <a:xfrm>
-            <a:off x="640080" y="2286000"/>
-            <a:ext cx="3474720" cy="365760"/>
-          </a:xfrm>
-          <a:prstGeom prst="rect">
-            <a:avLst/>
-          </a:prstGeom>
-          <a:noFill/>
-        </p:spPr>
-        <p:txBody>
-          <a:bodyPr wrap="square" anchor="t">
-            <a:spAutoFit/>
-          </a:bodyPr>
-          <a:lstStyle/>
-          <a:p>
-            <a:pPr algn="l"/>
-            <a:r>
-              <a:rPr sz="1300" b="1">
-                <a:solidFill>
-                  <a:srgbClr val="E30613"/>
-                </a:solidFill>
-                <a:latin typeface="Inter"/>
-              </a:rPr>
-              <a:t>Правовые основы</a:t>
-            </a:r>
-          </a:p>
-        </p:txBody>
-      </p:sp>
-      <p:sp>
-        <p:nvSpPr>
-          <p:cNvPr id="6" name="TextBox 5"/>
-          <p:cNvSpPr txBox="1"/>
-          <p:nvPr/>
-        </p:nvSpPr>
-        <p:spPr>
-          <a:xfrm>
-            <a:off x="4480560" y="2286000"/>
-            <a:ext cx="7071055" cy="640080"/>
-          </a:xfrm>
-          <a:prstGeom prst="rect">
-            <a:avLst/>
-          </a:prstGeom>
-          <a:noFill/>
-        </p:spPr>
-        <p:txBody>
-          <a:bodyPr wrap="square" anchor="t">
-            <a:spAutoFit/>
-          </a:bodyPr>
-          <a:lstStyle/>
-          <a:p>
-            <a:pPr algn="l"/>
-            <a:r>
-              <a:rPr sz="1200" b="0">
-                <a:solidFill>
-                  <a:srgbClr val="6B7280"/>
-                </a:solidFill>
-                <a:latin typeface="Inter"/>
-              </a:rPr>
-              <a:t>116-ФЗ, аттестация по Б.7.5, производственный контроль и надзор Ростехнадзора.</a:t>
-            </a:r>
-          </a:p>
-        </p:txBody>
-      </p:sp>
-      <p:sp>
-        <p:nvSpPr>
-          <p:cNvPr id="7" name="TextBox 6"/>
-          <p:cNvSpPr txBox="1"/>
-          <p:nvPr/>
-        </p:nvSpPr>
-        <p:spPr>
-          <a:xfrm>
-            <a:off x="640080" y="3314700"/>
-            <a:ext cx="3474720" cy="365760"/>
-          </a:xfrm>
-          <a:prstGeom prst="rect">
-            <a:avLst/>
-          </a:prstGeom>
-          <a:noFill/>
-        </p:spPr>
-        <p:txBody>
-          <a:bodyPr wrap="square" anchor="t">
-            <a:spAutoFit/>
-          </a:bodyPr>
-          <a:lstStyle/>
-          <a:p>
-            <a:pPr algn="l"/>
-            <a:r>
-              <a:rPr sz="1300" b="1">
-                <a:solidFill>
-                  <a:srgbClr val="E30613"/>
-                </a:solidFill>
-                <a:latin typeface="Inter"/>
-              </a:rPr>
-              <a:t>Проектирование</a:t>
-            </a:r>
-          </a:p>
-        </p:txBody>
-      </p:sp>
-      <p:sp>
-        <p:nvSpPr>
-          <p:cNvPr id="8" name="TextBox 7"/>
-          <p:cNvSpPr txBox="1"/>
-          <p:nvPr/>
-        </p:nvSpPr>
-        <p:spPr>
-          <a:xfrm>
-            <a:off x="4480560" y="3314700"/>
-            <a:ext cx="7071055" cy="640080"/>
-          </a:xfrm>
-          <a:prstGeom prst="rect">
-            <a:avLst/>
-          </a:prstGeom>
-          <a:noFill/>
-        </p:spPr>
-        <p:txBody>
-          <a:bodyPr wrap="square" anchor="t">
-            <a:spAutoFit/>
-          </a:bodyPr>
-          <a:lstStyle/>
-          <a:p>
-            <a:pPr algn="l"/>
-            <a:r>
-              <a:rPr sz="1200" b="0">
-                <a:solidFill>
-                  <a:srgbClr val="6B7280"/>
-                </a:solidFill>
-                <a:latin typeface="Inter"/>
-              </a:rPr>
-              <a:t>ФНП № 531, СП; выбор трасс, материалов, ГРП/ГРУ; экспертиза проектной документации.</a:t>
-            </a:r>
-          </a:p>
-        </p:txBody>
-      </p:sp>
-      <p:sp>
-        <p:nvSpPr>
-          <p:cNvPr id="9" name="TextBox 8"/>
-          <p:cNvSpPr txBox="1"/>
-          <p:nvPr/>
-        </p:nvSpPr>
-        <p:spPr>
-          <a:xfrm>
-            <a:off x="640080" y="4343400"/>
-            <a:ext cx="3474720" cy="365760"/>
-          </a:xfrm>
-          <a:prstGeom prst="rect">
-            <a:avLst/>
-          </a:prstGeom>
-          <a:noFill/>
-        </p:spPr>
-        <p:txBody>
-          <a:bodyPr wrap="square" anchor="t">
-            <a:spAutoFit/>
-          </a:bodyPr>
-          <a:lstStyle/>
-          <a:p>
-            <a:pPr algn="l"/>
-            <a:r>
-              <a:rPr sz="1300" b="1">
-                <a:solidFill>
-                  <a:srgbClr val="E30613"/>
-                </a:solidFill>
-                <a:latin typeface="Inter"/>
-              </a:rPr>
-              <a:t>Строительство</a:t>
-            </a:r>
-          </a:p>
-        </p:txBody>
-      </p:sp>
-      <p:sp>
-        <p:nvSpPr>
-          <p:cNvPr id="10" name="TextBox 9"/>
-          <p:cNvSpPr txBox="1"/>
-          <p:nvPr/>
-        </p:nvSpPr>
-        <p:spPr>
-          <a:xfrm>
-            <a:off x="4480560" y="4343400"/>
-            <a:ext cx="7071055" cy="640080"/>
-          </a:xfrm>
-          <a:prstGeom prst="rect">
-            <a:avLst/>
-          </a:prstGeom>
-          <a:noFill/>
-        </p:spPr>
-        <p:txBody>
-          <a:bodyPr wrap="square" anchor="t">
-            <a:spAutoFit/>
-          </a:bodyPr>
-          <a:lstStyle/>
-          <a:p>
-            <a:pPr algn="l"/>
-            <a:r>
-              <a:rPr sz="1200" b="0">
-                <a:solidFill>
-                  <a:srgbClr val="6B7280"/>
-                </a:solidFill>
-                <a:latin typeface="Inter"/>
-              </a:rPr>
-              <a:t>СМР, реконструкция, капремонт, газоопасные работы, охранные зоны.</a:t>
-            </a:r>
-          </a:p>
-        </p:txBody>
-      </p:sp>
-      <p:sp>
-        <p:nvSpPr>
-          <p:cNvPr id="11" name="TextBox 10"/>
-          <p:cNvSpPr txBox="1"/>
-          <p:nvPr/>
-        </p:nvSpPr>
-        <p:spPr>
-          <a:xfrm>
-            <a:off x="640080" y="5372100"/>
-            <a:ext cx="3474720" cy="365760"/>
-          </a:xfrm>
-          <a:prstGeom prst="rect">
-            <a:avLst/>
-          </a:prstGeom>
-          <a:noFill/>
-        </p:spPr>
-        <p:txBody>
-          <a:bodyPr wrap="square" anchor="t">
-            <a:spAutoFit/>
-          </a:bodyPr>
-          <a:lstStyle/>
-          <a:p>
-            <a:pPr algn="l"/>
-            <a:r>
-              <a:rPr sz="1300" b="1">
-                <a:solidFill>
-                  <a:srgbClr val="E30613"/>
-                </a:solidFill>
-                <a:latin typeface="Inter"/>
-              </a:rPr>
-              <a:t>Контроль качества</a:t>
-            </a:r>
-          </a:p>
-        </p:txBody>
-      </p:sp>
-      <p:sp>
-        <p:nvSpPr>
-          <p:cNvPr id="12" name="TextBox 11"/>
-          <p:cNvSpPr txBox="1"/>
-          <p:nvPr/>
-        </p:nvSpPr>
-        <p:spPr>
-          <a:xfrm>
-            <a:off x="4480560" y="5372100"/>
-            <a:ext cx="7071055" cy="640080"/>
-          </a:xfrm>
-          <a:prstGeom prst="rect">
-            <a:avLst/>
-          </a:prstGeom>
-          <a:noFill/>
-        </p:spPr>
-        <p:txBody>
-          <a:bodyPr wrap="square" anchor="t">
-            <a:spAutoFit/>
-          </a:bodyPr>
-          <a:lstStyle/>
-          <a:p>
-            <a:pPr algn="l"/>
-            <a:r>
-              <a:rPr sz="1200" b="0">
-                <a:solidFill>
-                  <a:srgbClr val="6B7280"/>
-                </a:solidFill>
-                <a:latin typeface="Inter"/>
-              </a:rPr>
-              <a:t>Сварка, НК, испытания на прочность и герметичность, пуск газа, приёмка.</a:t>
-            </a:r>
-          </a:p>
-        </p:txBody>
-      </p:sp>
-      <p:sp>
-        <p:nvSpPr>
-          <p:cNvPr id="13" name="Rectangle 12"/>
-          <p:cNvSpPr/>
-          <p:nvPr/>
-        </p:nvSpPr>
-        <p:spPr>
-          <a:xfrm>
-            <a:off x="640080" y="6355080"/>
-            <a:ext cx="10911535" cy="91440"/>
-          </a:xfrm>
-          <a:prstGeom prst="rect">
-            <a:avLst/>
-          </a:prstGeom>
-          <a:solidFill>
-            <a:srgbClr val="E30613"/>
-          </a:solidFill>
-          <a:ln>
-            <a:noFill/>
-          </a:ln>
-        </p:spPr>
-        <p:style>
-          <a:lnRef idx="1">
-            <a:schemeClr val="accent1"/>
-          </a:lnRef>
-          <a:fillRef idx="3">
-            <a:schemeClr val="accent1"/>
-          </a:fillRef>
-          <a:effectRef idx="2">
-            <a:schemeClr val="accent1"/>
-          </a:effectRef>
-          <a:fontRef idx="minor">
-            <a:schemeClr val="lt1"/>
-          </a:fontRef>
-        </p:style>
-        <p:txBody>
-          <a:bodyPr rtlCol="0" anchor="ctr"/>
-          <a:lstStyle/>
-          <a:p>
-            <a:pPr algn="ctr"/>
-          </a:p>
-        </p:txBody>
-      </p:sp>
-      <p:sp>
-        <p:nvSpPr>
-          <p:cNvPr id="14" name="TextBox 13"/>
-          <p:cNvSpPr txBox="1"/>
-          <p:nvPr/>
-        </p:nvSpPr>
-        <p:spPr>
-          <a:xfrm>
-            <a:off x="10180015" y="6492240"/>
-            <a:ext cx="1188720" cy="228600"/>
-          </a:xfrm>
-          <a:prstGeom prst="rect">
-            <a:avLst/>
-          </a:prstGeom>
-          <a:noFill/>
-        </p:spPr>
-        <p:txBody>
-          <a:bodyPr wrap="square" anchor="t">
-            <a:spAutoFit/>
-          </a:bodyPr>
-          <a:lstStyle/>
-          <a:p>
-            <a:pPr algn="r"/>
-            <a:r>
-              <a:rPr sz="1100" b="0">
-                <a:solidFill>
-                  <a:srgbClr val="6B7280"/>
-                </a:solidFill>
-                <a:latin typeface="Inter"/>
-              </a:rPr>
-              <a:t>18 / 19</a:t>
-            </a:r>
-          </a:p>
-        </p:txBody>
-      </p:sp>
-    </p:spTree>
-  </p:cSld>
-  <p:clrMapOvr>
-    <a:masterClrMapping/>
-  </p:clrMapOvr>
-</p:sld>
-</file>
-
-<file path=ppt/slides/slide19.xml><?xml version="1.0" encoding="utf-8"?>
-<p:sld xmlns:a="http://schemas.openxmlformats.org/drawingml/2006/main" xmlns:p="http://schemas.openxmlformats.org/presentationml/2006/main" xmlns:r="http://schemas.openxmlformats.org/officeDocument/2006/relationships">
-  <p:cSld>
-    <p:spTree>
-      <p:nvGrpSpPr>
-        <p:cNvPr id="1" name=""/>
-        <p:cNvGrpSpPr/>
-        <p:nvPr/>
-      </p:nvGrpSpPr>
-      <p:grpSpPr/>
-      <p:sp>
-        <p:nvSpPr>
-          <p:cNvPr id="2" name="Rectangle 1"/>
-          <p:cNvSpPr/>
-          <p:nvPr/>
-        </p:nvSpPr>
-        <p:spPr>
-          <a:xfrm>
-            <a:off x="0" y="0"/>
-            <a:ext cx="12192000" cy="6858000"/>
-          </a:xfrm>
-          <a:prstGeom prst="rect">
-            <a:avLst/>
-          </a:prstGeom>
-          <a:solidFill>
-            <a:srgbClr val="FAFAFA"/>
-          </a:solidFill>
-          <a:ln>
-            <a:noFill/>
-          </a:ln>
-        </p:spPr>
-        <p:style>
-          <a:lnRef idx="1">
-            <a:schemeClr val="accent1"/>
-          </a:lnRef>
-          <a:fillRef idx="3">
-            <a:schemeClr val="accent1"/>
-          </a:fillRef>
-          <a:effectRef idx="2">
-            <a:schemeClr val="accent1"/>
-          </a:effectRef>
-          <a:fontRef idx="minor">
-            <a:schemeClr val="lt1"/>
-          </a:fontRef>
-        </p:style>
-        <p:txBody>
-          <a:bodyPr rtlCol="0" anchor="ctr"/>
-          <a:lstStyle/>
-          <a:p>
-            <a:pPr algn="ctr"/>
-          </a:p>
-        </p:txBody>
-      </p:sp>
-      <p:sp>
-        <p:nvSpPr>
-          <p:cNvPr id="3" name="TextBox 2"/>
-          <p:cNvSpPr txBox="1"/>
-          <p:nvPr/>
-        </p:nvSpPr>
-        <p:spPr>
-          <a:xfrm>
-            <a:off x="640080" y="731520"/>
-            <a:ext cx="4572000" cy="228600"/>
-          </a:xfrm>
-          <a:prstGeom prst="rect">
-            <a:avLst/>
-          </a:prstGeom>
-          <a:noFill/>
-        </p:spPr>
-        <p:txBody>
-          <a:bodyPr wrap="square" anchor="t">
-            <a:spAutoFit/>
-          </a:bodyPr>
-          <a:lstStyle/>
-          <a:p>
-            <a:pPr algn="l"/>
-            <a:r>
-              <a:rPr sz="1400" b="1">
-                <a:solidFill>
-                  <a:srgbClr val="E30613"/>
-                </a:solidFill>
-                <a:latin typeface="Inter"/>
-              </a:rPr>
-              <a:t>Итоги курса</a:t>
-            </a:r>
-          </a:p>
-        </p:txBody>
-      </p:sp>
-      <p:sp>
-        <p:nvSpPr>
-          <p:cNvPr id="4" name="TextBox 3"/>
-          <p:cNvSpPr txBox="1"/>
-          <p:nvPr/>
-        </p:nvSpPr>
-        <p:spPr>
-          <a:xfrm>
-            <a:off x="640080" y="1005840"/>
-            <a:ext cx="10911535" cy="914400"/>
-          </a:xfrm>
-          <a:prstGeom prst="rect">
-            <a:avLst/>
-          </a:prstGeom>
-          <a:noFill/>
-        </p:spPr>
-        <p:txBody>
-          <a:bodyPr wrap="square" anchor="t">
-            <a:spAutoFit/>
-          </a:bodyPr>
-          <a:lstStyle/>
-          <a:p>
-            <a:pPr algn="l"/>
-            <a:r>
-              <a:rPr sz="2200" b="1">
-                <a:solidFill>
-                  <a:srgbClr val="1A1A1A"/>
-                </a:solidFill>
-                <a:latin typeface="Inter"/>
-              </a:rPr>
-              <a:t>Ключевые положения программы Б.7.5 (2/2)</a:t>
-            </a:r>
-          </a:p>
-        </p:txBody>
-      </p:sp>
-      <p:sp>
-        <p:nvSpPr>
-          <p:cNvPr id="5" name="TextBox 4"/>
-          <p:cNvSpPr txBox="1"/>
-          <p:nvPr/>
-        </p:nvSpPr>
-        <p:spPr>
-          <a:xfrm>
-            <a:off x="640080" y="2286000"/>
-            <a:ext cx="3474720" cy="365760"/>
-          </a:xfrm>
-          <a:prstGeom prst="rect">
-            <a:avLst/>
-          </a:prstGeom>
-          <a:noFill/>
-        </p:spPr>
-        <p:txBody>
-          <a:bodyPr wrap="square" anchor="t">
-            <a:spAutoFit/>
-          </a:bodyPr>
-          <a:lstStyle/>
-          <a:p>
-            <a:pPr algn="l"/>
-            <a:r>
-              <a:rPr sz="1300" b="1">
-                <a:solidFill>
-                  <a:srgbClr val="E30613"/>
-                </a:solidFill>
-                <a:latin typeface="Inter"/>
-              </a:rPr>
-              <a:t>Итоговая аттестация</a:t>
-            </a:r>
-          </a:p>
-        </p:txBody>
-      </p:sp>
-      <p:sp>
-        <p:nvSpPr>
-          <p:cNvPr id="6" name="TextBox 5"/>
-          <p:cNvSpPr txBox="1"/>
-          <p:nvPr/>
-        </p:nvSpPr>
-        <p:spPr>
-          <a:xfrm>
-            <a:off x="4480560" y="2286000"/>
-            <a:ext cx="7071055" cy="640080"/>
-          </a:xfrm>
-          <a:prstGeom prst="rect">
-            <a:avLst/>
-          </a:prstGeom>
-          <a:noFill/>
-        </p:spPr>
-        <p:txBody>
-          <a:bodyPr wrap="square" anchor="t">
-            <a:spAutoFit/>
-          </a:bodyPr>
-          <a:lstStyle/>
-          <a:p>
-            <a:pPr algn="l"/>
-            <a:r>
-              <a:rPr sz="1200" b="0">
-                <a:solidFill>
-                  <a:srgbClr val="6B7280"/>
-                </a:solidFill>
-                <a:latin typeface="Inter"/>
-              </a:rPr>
-              <a:t>Проверка знаний в Едином портале тестирования Ростехнадзора по области Б.7.5.</a:t>
-            </a:r>
-          </a:p>
-        </p:txBody>
-      </p:sp>
-      <p:sp>
-        <p:nvSpPr>
-          <p:cNvPr id="7" name="TextBox 6"/>
-          <p:cNvSpPr txBox="1"/>
-          <p:nvPr/>
-        </p:nvSpPr>
-        <p:spPr>
-          <a:xfrm>
-            <a:off x="640080" y="3314700"/>
-            <a:ext cx="3474720" cy="365760"/>
-          </a:xfrm>
-          <a:prstGeom prst="rect">
-            <a:avLst/>
-          </a:prstGeom>
-          <a:noFill/>
-        </p:spPr>
-        <p:txBody>
-          <a:bodyPr wrap="square" anchor="t">
-            <a:spAutoFit/>
-          </a:bodyPr>
-          <a:lstStyle/>
-          <a:p>
-            <a:pPr algn="l"/>
-            <a:r>
-              <a:rPr sz="1300" b="1">
-                <a:solidFill>
-                  <a:srgbClr val="E30613"/>
-                </a:solidFill>
-                <a:latin typeface="Inter"/>
-              </a:rPr>
-              <a:t>Документ об обучении</a:t>
-            </a:r>
-          </a:p>
-        </p:txBody>
-      </p:sp>
-      <p:sp>
-        <p:nvSpPr>
-          <p:cNvPr id="8" name="TextBox 7"/>
-          <p:cNvSpPr txBox="1"/>
-          <p:nvPr/>
-        </p:nvSpPr>
-        <p:spPr>
-          <a:xfrm>
-            <a:off x="4480560" y="3314700"/>
-            <a:ext cx="7071055" cy="640080"/>
-          </a:xfrm>
-          <a:prstGeom prst="rect">
-            <a:avLst/>
-          </a:prstGeom>
-          <a:noFill/>
-        </p:spPr>
-        <p:txBody>
-          <a:bodyPr wrap="square" anchor="t">
-            <a:spAutoFit/>
-          </a:bodyPr>
-          <a:lstStyle/>
-          <a:p>
-            <a:pPr algn="l"/>
-            <a:r>
-              <a:rPr sz="1200" b="0">
-                <a:solidFill>
-                  <a:srgbClr val="6B7280"/>
-                </a:solidFill>
-                <a:latin typeface="Inter"/>
-              </a:rPr>
-              <a:t>Удостоверение о повышении квалификации; срок действия аттестации — 5 лет.</a:t>
-            </a:r>
-          </a:p>
-        </p:txBody>
-      </p:sp>
-      <p:sp>
-        <p:nvSpPr>
-          <p:cNvPr id="9" name="TextBox 8"/>
-          <p:cNvSpPr txBox="1"/>
-          <p:nvPr/>
-        </p:nvSpPr>
-        <p:spPr>
-          <a:xfrm>
-            <a:off x="640080" y="4343400"/>
-            <a:ext cx="3474720" cy="365760"/>
-          </a:xfrm>
-          <a:prstGeom prst="rect">
-            <a:avLst/>
-          </a:prstGeom>
-          <a:noFill/>
-        </p:spPr>
-        <p:txBody>
-          <a:bodyPr wrap="square" anchor="t">
-            <a:spAutoFit/>
-          </a:bodyPr>
-          <a:lstStyle/>
-          <a:p>
-            <a:pPr algn="l"/>
-            <a:r>
-              <a:rPr sz="1300" b="1">
-                <a:solidFill>
-                  <a:srgbClr val="E30613"/>
-                </a:solidFill>
-                <a:latin typeface="Inter"/>
-              </a:rPr>
-              <a:t>Периодичность обучения</a:t>
-            </a:r>
-          </a:p>
-        </p:txBody>
-      </p:sp>
-      <p:sp>
-        <p:nvSpPr>
-          <p:cNvPr id="10" name="TextBox 9"/>
-          <p:cNvSpPr txBox="1"/>
-          <p:nvPr/>
-        </p:nvSpPr>
-        <p:spPr>
-          <a:xfrm>
-            <a:off x="4480560" y="4343400"/>
-            <a:ext cx="7071055" cy="640080"/>
-          </a:xfrm>
-          <a:prstGeom prst="rect">
-            <a:avLst/>
-          </a:prstGeom>
-          <a:noFill/>
-        </p:spPr>
-        <p:txBody>
-          <a:bodyPr wrap="square" anchor="t">
-            <a:spAutoFit/>
-          </a:bodyPr>
-          <a:lstStyle/>
-          <a:p>
-            <a:pPr algn="l"/>
-            <a:r>
-              <a:rPr sz="1200" b="0">
-                <a:solidFill>
-                  <a:srgbClr val="6B7280"/>
-                </a:solidFill>
-                <a:latin typeface="Inter"/>
-              </a:rPr>
-              <a:t>Не реже одного раза в 5 лет (ч. 1 ст. 14.1 116-ФЗ).</a:t>
-            </a:r>
-          </a:p>
-        </p:txBody>
-      </p:sp>
-      <p:sp>
-        <p:nvSpPr>
-          <p:cNvPr id="11" name="TextBox 10"/>
-          <p:cNvSpPr txBox="1"/>
-          <p:nvPr/>
-        </p:nvSpPr>
-        <p:spPr>
-          <a:xfrm>
-            <a:off x="640080" y="5221224"/>
-            <a:ext cx="10911535" cy="548640"/>
-          </a:xfrm>
-          <a:prstGeom prst="rect">
-            <a:avLst/>
-          </a:prstGeom>
-          <a:noFill/>
-        </p:spPr>
-        <p:txBody>
-          <a:bodyPr wrap="square" anchor="t">
-            <a:spAutoFit/>
-          </a:bodyPr>
-          <a:lstStyle/>
-          <a:p>
-            <a:pPr algn="l"/>
-            <a:r>
-              <a:rPr sz="1200" b="0">
-                <a:solidFill>
-                  <a:srgbClr val="6B7280"/>
-                </a:solidFill>
-                <a:latin typeface="Inter"/>
-              </a:rPr>
-              <a:t>Соблюдение требований ФНП № 531 на этапах проектирования, строительства и ремонта обеспечивает безопасность сетей газораспределения и газопотребления.</a:t>
-            </a:r>
-          </a:p>
-        </p:txBody>
-      </p:sp>
-      <p:sp>
-        <p:nvSpPr>
-          <p:cNvPr id="12" name="Rectangle 11"/>
-          <p:cNvSpPr/>
-          <p:nvPr/>
-        </p:nvSpPr>
-        <p:spPr>
-          <a:xfrm>
-            <a:off x="640080" y="6355080"/>
-            <a:ext cx="10911535" cy="91440"/>
-          </a:xfrm>
-          <a:prstGeom prst="rect">
-            <a:avLst/>
-          </a:prstGeom>
-          <a:solidFill>
-            <a:srgbClr val="E30613"/>
-          </a:solidFill>
-          <a:ln>
-            <a:noFill/>
-          </a:ln>
-        </p:spPr>
-        <p:style>
-          <a:lnRef idx="1">
-            <a:schemeClr val="accent1"/>
-          </a:lnRef>
-          <a:fillRef idx="3">
-            <a:schemeClr val="accent1"/>
-          </a:fillRef>
-          <a:effectRef idx="2">
-            <a:schemeClr val="accent1"/>
-          </a:effectRef>
-          <a:fontRef idx="minor">
-            <a:schemeClr val="lt1"/>
-          </a:fontRef>
-        </p:style>
-        <p:txBody>
-          <a:bodyPr rtlCol="0" anchor="ctr"/>
-          <a:lstStyle/>
-          <a:p>
-            <a:pPr algn="ctr"/>
-          </a:p>
-        </p:txBody>
-      </p:sp>
-      <p:sp>
-        <p:nvSpPr>
-          <p:cNvPr id="13" name="TextBox 12"/>
-          <p:cNvSpPr txBox="1"/>
-          <p:nvPr/>
-        </p:nvSpPr>
-        <p:spPr>
-          <a:xfrm>
-            <a:off x="10180015" y="6492240"/>
-            <a:ext cx="1188720" cy="228600"/>
-          </a:xfrm>
-          <a:prstGeom prst="rect">
-            <a:avLst/>
-          </a:prstGeom>
-          <a:noFill/>
-        </p:spPr>
-        <p:txBody>
-          <a:bodyPr wrap="square" anchor="t">
-            <a:spAutoFit/>
-          </a:bodyPr>
-          <a:lstStyle/>
-          <a:p>
-            <a:pPr algn="r"/>
-            <a:r>
-              <a:rPr sz="1100" b="0">
-                <a:solidFill>
-                  <a:srgbClr val="6B7280"/>
-                </a:solidFill>
-                <a:latin typeface="Inter"/>
-              </a:rPr>
-              <a:t>19 / 19</a:t>
+              <a:t>15 / 15</a:t>
             </a:r>
           </a:p>
         </p:txBody>
@@ -7850,7 +6197,7 @@
                 </a:solidFill>
                 <a:latin typeface="Inter"/>
               </a:rPr>
-              <a:t>02 / 19</a:t>
+              <a:t>02 / 15</a:t>
             </a:r>
           </a:p>
         </p:txBody>
@@ -8207,7 +6554,7 @@
                 </a:solidFill>
                 <a:latin typeface="Inter"/>
               </a:rPr>
-              <a:t>03 / 19</a:t>
+              <a:t>03 / 15</a:t>
             </a:r>
           </a:p>
         </p:txBody>
@@ -8661,7 +7008,7 @@
                 </a:solidFill>
                 <a:latin typeface="Inter"/>
               </a:rPr>
-              <a:t>04 / 19</a:t>
+              <a:t>04 / 15</a:t>
             </a:r>
           </a:p>
         </p:txBody>
@@ -9115,7 +7462,7 @@
                 </a:solidFill>
                 <a:latin typeface="Inter"/>
               </a:rPr>
-              <a:t>05 / 19</a:t>
+              <a:t>05 / 15</a:t>
             </a:r>
           </a:p>
         </p:txBody>
@@ -9472,7 +7819,7 @@
                 </a:solidFill>
                 <a:latin typeface="Inter"/>
               </a:rPr>
-              <a:t>06 / 19</a:t>
+              <a:t>06 / 15</a:t>
             </a:r>
           </a:p>
         </p:txBody>
@@ -9926,7 +8273,7 @@
                 </a:solidFill>
                 <a:latin typeface="Inter"/>
               </a:rPr>
-              <a:t>07 / 19</a:t>
+              <a:t>07 / 15</a:t>
             </a:r>
           </a:p>
         </p:txBody>
@@ -10240,7 +8587,7 @@
                 </a:solidFill>
                 <a:latin typeface="Inter"/>
               </a:rPr>
-              <a:t>08 / 19</a:t>
+              <a:t>08 / 15</a:t>
             </a:r>
           </a:p>
         </p:txBody>
@@ -10694,7 +9041,7 @@
                 </a:solidFill>
                 <a:latin typeface="Inter"/>
               </a:rPr>
-              <a:t>09 / 19</a:t>
+              <a:t>09 / 15</a:t>
             </a:r>
           </a:p>
         </p:txBody>
